--- a/public/fun/pack/pptx/review/보장점검양식_04_부모님점검_제주유채밭.pptx
+++ b/public/fun/pack/pptx/review/보장점검양식_04_부모님점검_제주유채밭.pptx
@@ -3347,7 +3347,7 @@
             <a:r>
               <a:rPr sz="3600" b="1" i="0">
                 <a:solidFill>
-                  <a:srgbClr val="605610"/>
+                  <a:srgbClr val="72671D"/>
                 </a:solidFill>
               </a:rPr>
               <a:t>우리 보험 점검 시간</a:t>
@@ -3385,7 +3385,7 @@
             <a:r>
               <a:rPr sz="1700" b="0" i="1">
                 <a:solidFill>
-                  <a:srgbClr val="605610"/>
+                  <a:srgbClr val="72671D"/>
                 </a:solidFill>
               </a:rPr>
               <a:t>부모님 증권부터 먼저 찾아봅니다</a:t>
@@ -3487,7 +3487,7 @@
             <a:avLst/>
           </a:prstGeom>
           <a:solidFill>
-            <a:srgbClr val="B8A41E"/>
+            <a:srgbClr val="DFC93A"/>
           </a:solidFill>
           <a:ln>
             <a:noFill/>
@@ -3582,30 +3582,30 @@
                   <a:tcPr anchor="ctr" marL="73152" marR="73152">
                     <a:lnL w="9525" cap="flat" cmpd="sng" algn="ctr">
                       <a:solidFill>
-                        <a:srgbClr val="B8A41E"/>
+                        <a:srgbClr val="DFC93A"/>
                       </a:solidFill>
                       <a:prstDash val="solid"/>
                     </a:lnL>
                     <a:lnR w="9525" cap="flat" cmpd="sng" algn="ctr">
                       <a:solidFill>
-                        <a:srgbClr val="B8A41E"/>
+                        <a:srgbClr val="DFC93A"/>
                       </a:solidFill>
                       <a:prstDash val="solid"/>
                     </a:lnR>
                     <a:lnT w="9525" cap="flat" cmpd="sng" algn="ctr">
                       <a:solidFill>
-                        <a:srgbClr val="B8A41E"/>
+                        <a:srgbClr val="DFC93A"/>
                       </a:solidFill>
                       <a:prstDash val="solid"/>
                     </a:lnT>
                     <a:lnB w="9525" cap="flat" cmpd="sng" algn="ctr">
                       <a:solidFill>
-                        <a:srgbClr val="B8A41E"/>
+                        <a:srgbClr val="DFC93A"/>
                       </a:solidFill>
                       <a:prstDash val="solid"/>
                     </a:lnB>
                     <a:solidFill>
-                      <a:srgbClr val="B8A41E"/>
+                      <a:srgbClr val="DFC93A"/>
                     </a:solidFill>
                   </a:tcPr>
                 </a:tc>
@@ -3628,30 +3628,30 @@
                   <a:tcPr anchor="ctr" marL="73152" marR="73152">
                     <a:lnL w="9525" cap="flat" cmpd="sng" algn="ctr">
                       <a:solidFill>
-                        <a:srgbClr val="B8A41E"/>
+                        <a:srgbClr val="DFC93A"/>
                       </a:solidFill>
                       <a:prstDash val="solid"/>
                     </a:lnL>
                     <a:lnR w="9525" cap="flat" cmpd="sng" algn="ctr">
                       <a:solidFill>
-                        <a:srgbClr val="B8A41E"/>
+                        <a:srgbClr val="DFC93A"/>
                       </a:solidFill>
                       <a:prstDash val="solid"/>
                     </a:lnR>
                     <a:lnT w="9525" cap="flat" cmpd="sng" algn="ctr">
                       <a:solidFill>
-                        <a:srgbClr val="B8A41E"/>
+                        <a:srgbClr val="DFC93A"/>
                       </a:solidFill>
                       <a:prstDash val="solid"/>
                     </a:lnT>
                     <a:lnB w="9525" cap="flat" cmpd="sng" algn="ctr">
                       <a:solidFill>
-                        <a:srgbClr val="B8A41E"/>
+                        <a:srgbClr val="DFC93A"/>
                       </a:solidFill>
                       <a:prstDash val="solid"/>
                     </a:lnB>
                     <a:solidFill>
-                      <a:srgbClr val="B8A41E"/>
+                      <a:srgbClr val="DFC93A"/>
                     </a:solidFill>
                   </a:tcPr>
                 </a:tc>
@@ -3674,30 +3674,30 @@
                   <a:tcPr anchor="ctr" marL="73152" marR="73152">
                     <a:lnL w="9525" cap="flat" cmpd="sng" algn="ctr">
                       <a:solidFill>
-                        <a:srgbClr val="B8A41E"/>
+                        <a:srgbClr val="DFC93A"/>
                       </a:solidFill>
                       <a:prstDash val="solid"/>
                     </a:lnL>
                     <a:lnR w="9525" cap="flat" cmpd="sng" algn="ctr">
                       <a:solidFill>
-                        <a:srgbClr val="B8A41E"/>
+                        <a:srgbClr val="DFC93A"/>
                       </a:solidFill>
                       <a:prstDash val="solid"/>
                     </a:lnR>
                     <a:lnT w="9525" cap="flat" cmpd="sng" algn="ctr">
                       <a:solidFill>
-                        <a:srgbClr val="B8A41E"/>
+                        <a:srgbClr val="DFC93A"/>
                       </a:solidFill>
                       <a:prstDash val="solid"/>
                     </a:lnT>
                     <a:lnB w="9525" cap="flat" cmpd="sng" algn="ctr">
                       <a:solidFill>
-                        <a:srgbClr val="B8A41E"/>
+                        <a:srgbClr val="DFC93A"/>
                       </a:solidFill>
                       <a:prstDash val="solid"/>
                     </a:lnB>
                     <a:solidFill>
-                      <a:srgbClr val="B8A41E"/>
+                      <a:srgbClr val="DFC93A"/>
                     </a:solidFill>
                   </a:tcPr>
                 </a:tc>
@@ -3712,7 +3712,7 @@
                       <a:r>
                         <a:rPr sz="1600" b="1">
                           <a:solidFill>
-                            <a:srgbClr val="605610"/>
+                            <a:srgbClr val="72671D"/>
                           </a:solidFill>
                         </a:rPr>
                         <a:t>성함</a:t>
@@ -3722,30 +3722,30 @@
                   <a:tcPr anchor="ctr" marL="73152" marR="73152">
                     <a:lnL w="9525" cap="flat" cmpd="sng" algn="ctr">
                       <a:solidFill>
-                        <a:srgbClr val="F8F2C9"/>
+                        <a:srgbClr val="F7F3D4"/>
                       </a:solidFill>
                       <a:prstDash val="solid"/>
                     </a:lnL>
                     <a:lnR w="9525" cap="flat" cmpd="sng" algn="ctr">
                       <a:solidFill>
-                        <a:srgbClr val="F8F2C9"/>
+                        <a:srgbClr val="F7F3D4"/>
                       </a:solidFill>
                       <a:prstDash val="solid"/>
                     </a:lnR>
                     <a:lnT w="9525" cap="flat" cmpd="sng" algn="ctr">
                       <a:solidFill>
-                        <a:srgbClr val="F8F2C9"/>
+                        <a:srgbClr val="F7F3D4"/>
                       </a:solidFill>
                       <a:prstDash val="solid"/>
                     </a:lnT>
                     <a:lnB w="9525" cap="flat" cmpd="sng" algn="ctr">
                       <a:solidFill>
-                        <a:srgbClr val="F8F2C9"/>
+                        <a:srgbClr val="F7F3D4"/>
                       </a:solidFill>
                       <a:prstDash val="solid"/>
                     </a:lnB>
                     <a:solidFill>
-                      <a:srgbClr val="F8F2C9"/>
+                      <a:srgbClr val="F7F3D4"/>
                     </a:solidFill>
                   </a:tcPr>
                 </a:tc>
@@ -3768,25 +3768,25 @@
                   <a:tcPr anchor="ctr" marL="73152" marR="73152">
                     <a:lnL w="9525" cap="flat" cmpd="sng" algn="ctr">
                       <a:solidFill>
-                        <a:srgbClr val="F8F2C9"/>
+                        <a:srgbClr val="F7F3D4"/>
                       </a:solidFill>
                       <a:prstDash val="solid"/>
                     </a:lnL>
                     <a:lnR w="9525" cap="flat" cmpd="sng" algn="ctr">
                       <a:solidFill>
-                        <a:srgbClr val="F8F2C9"/>
+                        <a:srgbClr val="F7F3D4"/>
                       </a:solidFill>
                       <a:prstDash val="solid"/>
                     </a:lnR>
                     <a:lnT w="9525" cap="flat" cmpd="sng" algn="ctr">
                       <a:solidFill>
-                        <a:srgbClr val="F8F2C9"/>
+                        <a:srgbClr val="F7F3D4"/>
                       </a:solidFill>
                       <a:prstDash val="solid"/>
                     </a:lnT>
                     <a:lnB w="9525" cap="flat" cmpd="sng" algn="ctr">
                       <a:solidFill>
-                        <a:srgbClr val="F8F2C9"/>
+                        <a:srgbClr val="F7F3D4"/>
                       </a:solidFill>
                       <a:prstDash val="solid"/>
                     </a:lnB>
@@ -3814,25 +3814,25 @@
                   <a:tcPr anchor="ctr" marL="73152" marR="73152">
                     <a:lnL w="9525" cap="flat" cmpd="sng" algn="ctr">
                       <a:solidFill>
-                        <a:srgbClr val="F8F2C9"/>
+                        <a:srgbClr val="F7F3D4"/>
                       </a:solidFill>
                       <a:prstDash val="solid"/>
                     </a:lnL>
                     <a:lnR w="9525" cap="flat" cmpd="sng" algn="ctr">
                       <a:solidFill>
-                        <a:srgbClr val="F8F2C9"/>
+                        <a:srgbClr val="F7F3D4"/>
                       </a:solidFill>
                       <a:prstDash val="solid"/>
                     </a:lnR>
                     <a:lnT w="9525" cap="flat" cmpd="sng" algn="ctr">
                       <a:solidFill>
-                        <a:srgbClr val="F8F2C9"/>
+                        <a:srgbClr val="F7F3D4"/>
                       </a:solidFill>
                       <a:prstDash val="solid"/>
                     </a:lnT>
                     <a:lnB w="9525" cap="flat" cmpd="sng" algn="ctr">
                       <a:solidFill>
-                        <a:srgbClr val="F8F2C9"/>
+                        <a:srgbClr val="F7F3D4"/>
                       </a:solidFill>
                       <a:prstDash val="solid"/>
                     </a:lnB>
@@ -3852,7 +3852,7 @@
                       <a:r>
                         <a:rPr sz="1600" b="1">
                           <a:solidFill>
-                            <a:srgbClr val="605610"/>
+                            <a:srgbClr val="72671D"/>
                           </a:solidFill>
                         </a:rPr>
                         <a:t>연세</a:t>
@@ -3862,30 +3862,30 @@
                   <a:tcPr anchor="ctr" marL="73152" marR="73152">
                     <a:lnL w="9525" cap="flat" cmpd="sng" algn="ctr">
                       <a:solidFill>
-                        <a:srgbClr val="F8F2C9"/>
+                        <a:srgbClr val="F7F3D4"/>
                       </a:solidFill>
                       <a:prstDash val="solid"/>
                     </a:lnL>
                     <a:lnR w="9525" cap="flat" cmpd="sng" algn="ctr">
                       <a:solidFill>
-                        <a:srgbClr val="F8F2C9"/>
+                        <a:srgbClr val="F7F3D4"/>
                       </a:solidFill>
                       <a:prstDash val="solid"/>
                     </a:lnR>
                     <a:lnT w="9525" cap="flat" cmpd="sng" algn="ctr">
                       <a:solidFill>
-                        <a:srgbClr val="F8F2C9"/>
+                        <a:srgbClr val="F7F3D4"/>
                       </a:solidFill>
                       <a:prstDash val="solid"/>
                     </a:lnT>
                     <a:lnB w="9525" cap="flat" cmpd="sng" algn="ctr">
                       <a:solidFill>
-                        <a:srgbClr val="F8F2C9"/>
+                        <a:srgbClr val="F7F3D4"/>
                       </a:solidFill>
                       <a:prstDash val="solid"/>
                     </a:lnB>
                     <a:solidFill>
-                      <a:srgbClr val="F8F2C9"/>
+                      <a:srgbClr val="F7F3D4"/>
                     </a:solidFill>
                   </a:tcPr>
                 </a:tc>
@@ -3908,30 +3908,30 @@
                   <a:tcPr anchor="ctr" marL="73152" marR="73152">
                     <a:lnL w="9525" cap="flat" cmpd="sng" algn="ctr">
                       <a:solidFill>
-                        <a:srgbClr val="F8F2C9"/>
+                        <a:srgbClr val="F7F3D4"/>
                       </a:solidFill>
                       <a:prstDash val="solid"/>
                     </a:lnL>
                     <a:lnR w="9525" cap="flat" cmpd="sng" algn="ctr">
                       <a:solidFill>
-                        <a:srgbClr val="F8F2C9"/>
+                        <a:srgbClr val="F7F3D4"/>
                       </a:solidFill>
                       <a:prstDash val="solid"/>
                     </a:lnR>
                     <a:lnT w="9525" cap="flat" cmpd="sng" algn="ctr">
                       <a:solidFill>
-                        <a:srgbClr val="F8F2C9"/>
+                        <a:srgbClr val="F7F3D4"/>
                       </a:solidFill>
                       <a:prstDash val="solid"/>
                     </a:lnT>
                     <a:lnB w="9525" cap="flat" cmpd="sng" algn="ctr">
                       <a:solidFill>
-                        <a:srgbClr val="F8F2C9"/>
+                        <a:srgbClr val="F7F3D4"/>
                       </a:solidFill>
                       <a:prstDash val="solid"/>
                     </a:lnB>
                     <a:solidFill>
-                      <a:srgbClr val="FCFAED"/>
+                      <a:srgbClr val="FCFBF3"/>
                     </a:solidFill>
                   </a:tcPr>
                 </a:tc>
@@ -3954,30 +3954,30 @@
                   <a:tcPr anchor="ctr" marL="73152" marR="73152">
                     <a:lnL w="9525" cap="flat" cmpd="sng" algn="ctr">
                       <a:solidFill>
-                        <a:srgbClr val="F8F2C9"/>
+                        <a:srgbClr val="F7F3D4"/>
                       </a:solidFill>
                       <a:prstDash val="solid"/>
                     </a:lnL>
                     <a:lnR w="9525" cap="flat" cmpd="sng" algn="ctr">
                       <a:solidFill>
-                        <a:srgbClr val="F8F2C9"/>
+                        <a:srgbClr val="F7F3D4"/>
                       </a:solidFill>
                       <a:prstDash val="solid"/>
                     </a:lnR>
                     <a:lnT w="9525" cap="flat" cmpd="sng" algn="ctr">
                       <a:solidFill>
-                        <a:srgbClr val="F8F2C9"/>
+                        <a:srgbClr val="F7F3D4"/>
                       </a:solidFill>
                       <a:prstDash val="solid"/>
                     </a:lnT>
                     <a:lnB w="9525" cap="flat" cmpd="sng" algn="ctr">
                       <a:solidFill>
-                        <a:srgbClr val="F8F2C9"/>
+                        <a:srgbClr val="F7F3D4"/>
                       </a:solidFill>
                       <a:prstDash val="solid"/>
                     </a:lnB>
                     <a:solidFill>
-                      <a:srgbClr val="FCFAED"/>
+                      <a:srgbClr val="FCFBF3"/>
                     </a:solidFill>
                   </a:tcPr>
                 </a:tc>
@@ -3992,7 +3992,7 @@
                       <a:r>
                         <a:rPr sz="1600" b="1">
                           <a:solidFill>
-                            <a:srgbClr val="605610"/>
+                            <a:srgbClr val="72671D"/>
                           </a:solidFill>
                         </a:rPr>
                         <a:t>건강 상태 메모</a:t>
@@ -4002,30 +4002,30 @@
                   <a:tcPr anchor="ctr" marL="73152" marR="73152">
                     <a:lnL w="9525" cap="flat" cmpd="sng" algn="ctr">
                       <a:solidFill>
-                        <a:srgbClr val="F8F2C9"/>
+                        <a:srgbClr val="F7F3D4"/>
                       </a:solidFill>
                       <a:prstDash val="solid"/>
                     </a:lnL>
                     <a:lnR w="9525" cap="flat" cmpd="sng" algn="ctr">
                       <a:solidFill>
-                        <a:srgbClr val="F8F2C9"/>
+                        <a:srgbClr val="F7F3D4"/>
                       </a:solidFill>
                       <a:prstDash val="solid"/>
                     </a:lnR>
                     <a:lnT w="9525" cap="flat" cmpd="sng" algn="ctr">
                       <a:solidFill>
-                        <a:srgbClr val="F8F2C9"/>
+                        <a:srgbClr val="F7F3D4"/>
                       </a:solidFill>
                       <a:prstDash val="solid"/>
                     </a:lnT>
                     <a:lnB w="9525" cap="flat" cmpd="sng" algn="ctr">
                       <a:solidFill>
-                        <a:srgbClr val="F8F2C9"/>
+                        <a:srgbClr val="F7F3D4"/>
                       </a:solidFill>
                       <a:prstDash val="solid"/>
                     </a:lnB>
                     <a:solidFill>
-                      <a:srgbClr val="F8F2C9"/>
+                      <a:srgbClr val="F7F3D4"/>
                     </a:solidFill>
                   </a:tcPr>
                 </a:tc>
@@ -4048,25 +4048,25 @@
                   <a:tcPr anchor="ctr" marL="73152" marR="73152">
                     <a:lnL w="9525" cap="flat" cmpd="sng" algn="ctr">
                       <a:solidFill>
-                        <a:srgbClr val="F8F2C9"/>
+                        <a:srgbClr val="F7F3D4"/>
                       </a:solidFill>
                       <a:prstDash val="solid"/>
                     </a:lnL>
                     <a:lnR w="9525" cap="flat" cmpd="sng" algn="ctr">
                       <a:solidFill>
-                        <a:srgbClr val="F8F2C9"/>
+                        <a:srgbClr val="F7F3D4"/>
                       </a:solidFill>
                       <a:prstDash val="solid"/>
                     </a:lnR>
                     <a:lnT w="9525" cap="flat" cmpd="sng" algn="ctr">
                       <a:solidFill>
-                        <a:srgbClr val="F8F2C9"/>
+                        <a:srgbClr val="F7F3D4"/>
                       </a:solidFill>
                       <a:prstDash val="solid"/>
                     </a:lnT>
                     <a:lnB w="9525" cap="flat" cmpd="sng" algn="ctr">
                       <a:solidFill>
-                        <a:srgbClr val="F8F2C9"/>
+                        <a:srgbClr val="F7F3D4"/>
                       </a:solidFill>
                       <a:prstDash val="solid"/>
                     </a:lnB>
@@ -4094,25 +4094,25 @@
                   <a:tcPr anchor="ctr" marL="73152" marR="73152">
                     <a:lnL w="9525" cap="flat" cmpd="sng" algn="ctr">
                       <a:solidFill>
-                        <a:srgbClr val="F8F2C9"/>
+                        <a:srgbClr val="F7F3D4"/>
                       </a:solidFill>
                       <a:prstDash val="solid"/>
                     </a:lnL>
                     <a:lnR w="9525" cap="flat" cmpd="sng" algn="ctr">
                       <a:solidFill>
-                        <a:srgbClr val="F8F2C9"/>
+                        <a:srgbClr val="F7F3D4"/>
                       </a:solidFill>
                       <a:prstDash val="solid"/>
                     </a:lnR>
                     <a:lnT w="9525" cap="flat" cmpd="sng" algn="ctr">
                       <a:solidFill>
-                        <a:srgbClr val="F8F2C9"/>
+                        <a:srgbClr val="F7F3D4"/>
                       </a:solidFill>
                       <a:prstDash val="solid"/>
                     </a:lnT>
                     <a:lnB w="9525" cap="flat" cmpd="sng" algn="ctr">
                       <a:solidFill>
-                        <a:srgbClr val="F8F2C9"/>
+                        <a:srgbClr val="F7F3D4"/>
                       </a:solidFill>
                       <a:prstDash val="solid"/>
                     </a:lnB>
@@ -4132,7 +4132,7 @@
                       <a:r>
                         <a:rPr sz="1600" b="1">
                           <a:solidFill>
-                            <a:srgbClr val="605610"/>
+                            <a:srgbClr val="72671D"/>
                           </a:solidFill>
                         </a:rPr>
                         <a:t>함께 확인할 것</a:t>
@@ -4142,30 +4142,30 @@
                   <a:tcPr anchor="ctr" marL="73152" marR="73152">
                     <a:lnL w="9525" cap="flat" cmpd="sng" algn="ctr">
                       <a:solidFill>
-                        <a:srgbClr val="F8F2C9"/>
+                        <a:srgbClr val="F7F3D4"/>
                       </a:solidFill>
                       <a:prstDash val="solid"/>
                     </a:lnL>
                     <a:lnR w="9525" cap="flat" cmpd="sng" algn="ctr">
                       <a:solidFill>
-                        <a:srgbClr val="F8F2C9"/>
+                        <a:srgbClr val="F7F3D4"/>
                       </a:solidFill>
                       <a:prstDash val="solid"/>
                     </a:lnR>
                     <a:lnT w="9525" cap="flat" cmpd="sng" algn="ctr">
                       <a:solidFill>
-                        <a:srgbClr val="F8F2C9"/>
+                        <a:srgbClr val="F7F3D4"/>
                       </a:solidFill>
                       <a:prstDash val="solid"/>
                     </a:lnT>
                     <a:lnB w="9525" cap="flat" cmpd="sng" algn="ctr">
                       <a:solidFill>
-                        <a:srgbClr val="F8F2C9"/>
+                        <a:srgbClr val="F7F3D4"/>
                       </a:solidFill>
                       <a:prstDash val="solid"/>
                     </a:lnB>
                     <a:solidFill>
-                      <a:srgbClr val="F8F2C9"/>
+                      <a:srgbClr val="F7F3D4"/>
                     </a:solidFill>
                   </a:tcPr>
                 </a:tc>
@@ -4188,30 +4188,30 @@
                   <a:tcPr anchor="ctr" marL="73152" marR="73152">
                     <a:lnL w="9525" cap="flat" cmpd="sng" algn="ctr">
                       <a:solidFill>
-                        <a:srgbClr val="F8F2C9"/>
+                        <a:srgbClr val="F7F3D4"/>
                       </a:solidFill>
                       <a:prstDash val="solid"/>
                     </a:lnL>
                     <a:lnR w="9525" cap="flat" cmpd="sng" algn="ctr">
                       <a:solidFill>
-                        <a:srgbClr val="F8F2C9"/>
+                        <a:srgbClr val="F7F3D4"/>
                       </a:solidFill>
                       <a:prstDash val="solid"/>
                     </a:lnR>
                     <a:lnT w="9525" cap="flat" cmpd="sng" algn="ctr">
                       <a:solidFill>
-                        <a:srgbClr val="F8F2C9"/>
+                        <a:srgbClr val="F7F3D4"/>
                       </a:solidFill>
                       <a:prstDash val="solid"/>
                     </a:lnT>
                     <a:lnB w="9525" cap="flat" cmpd="sng" algn="ctr">
                       <a:solidFill>
-                        <a:srgbClr val="F8F2C9"/>
+                        <a:srgbClr val="F7F3D4"/>
                       </a:solidFill>
                       <a:prstDash val="solid"/>
                     </a:lnB>
                     <a:solidFill>
-                      <a:srgbClr val="FCFAED"/>
+                      <a:srgbClr val="FCFBF3"/>
                     </a:solidFill>
                   </a:tcPr>
                 </a:tc>
@@ -4234,30 +4234,30 @@
                   <a:tcPr anchor="ctr" marL="73152" marR="73152">
                     <a:lnL w="9525" cap="flat" cmpd="sng" algn="ctr">
                       <a:solidFill>
-                        <a:srgbClr val="F8F2C9"/>
+                        <a:srgbClr val="F7F3D4"/>
                       </a:solidFill>
                       <a:prstDash val="solid"/>
                     </a:lnL>
                     <a:lnR w="9525" cap="flat" cmpd="sng" algn="ctr">
                       <a:solidFill>
-                        <a:srgbClr val="F8F2C9"/>
+                        <a:srgbClr val="F7F3D4"/>
                       </a:solidFill>
                       <a:prstDash val="solid"/>
                     </a:lnR>
                     <a:lnT w="9525" cap="flat" cmpd="sng" algn="ctr">
                       <a:solidFill>
-                        <a:srgbClr val="F8F2C9"/>
+                        <a:srgbClr val="F7F3D4"/>
                       </a:solidFill>
                       <a:prstDash val="solid"/>
                     </a:lnT>
                     <a:lnB w="9525" cap="flat" cmpd="sng" algn="ctr">
                       <a:solidFill>
-                        <a:srgbClr val="F8F2C9"/>
+                        <a:srgbClr val="F7F3D4"/>
                       </a:solidFill>
                       <a:prstDash val="solid"/>
                     </a:lnB>
                     <a:solidFill>
-                      <a:srgbClr val="FCFAED"/>
+                      <a:srgbClr val="FCFBF3"/>
                     </a:solidFill>
                   </a:tcPr>
                 </a:tc>
@@ -4307,7 +4307,7 @@
             <a:avLst/>
           </a:prstGeom>
           <a:solidFill>
-            <a:srgbClr val="B8A41E"/>
+            <a:srgbClr val="DFC93A"/>
           </a:solidFill>
           <a:ln>
             <a:noFill/>
@@ -4404,30 +4404,30 @@
                   <a:tcPr anchor="ctr" marL="73152" marR="73152">
                     <a:lnL w="9525" cap="flat" cmpd="sng" algn="ctr">
                       <a:solidFill>
-                        <a:srgbClr val="B8A41E"/>
+                        <a:srgbClr val="DFC93A"/>
                       </a:solidFill>
                       <a:prstDash val="solid"/>
                     </a:lnL>
                     <a:lnR w="9525" cap="flat" cmpd="sng" algn="ctr">
                       <a:solidFill>
-                        <a:srgbClr val="B8A41E"/>
+                        <a:srgbClr val="DFC93A"/>
                       </a:solidFill>
                       <a:prstDash val="solid"/>
                     </a:lnR>
                     <a:lnT w="9525" cap="flat" cmpd="sng" algn="ctr">
                       <a:solidFill>
-                        <a:srgbClr val="B8A41E"/>
+                        <a:srgbClr val="DFC93A"/>
                       </a:solidFill>
                       <a:prstDash val="solid"/>
                     </a:lnT>
                     <a:lnB w="9525" cap="flat" cmpd="sng" algn="ctr">
                       <a:solidFill>
-                        <a:srgbClr val="B8A41E"/>
+                        <a:srgbClr val="DFC93A"/>
                       </a:solidFill>
                       <a:prstDash val="solid"/>
                     </a:lnB>
                     <a:solidFill>
-                      <a:srgbClr val="B8A41E"/>
+                      <a:srgbClr val="DFC93A"/>
                     </a:solidFill>
                   </a:tcPr>
                 </a:tc>
@@ -4450,30 +4450,30 @@
                   <a:tcPr anchor="ctr" marL="73152" marR="73152">
                     <a:lnL w="9525" cap="flat" cmpd="sng" algn="ctr">
                       <a:solidFill>
-                        <a:srgbClr val="B8A41E"/>
+                        <a:srgbClr val="DFC93A"/>
                       </a:solidFill>
                       <a:prstDash val="solid"/>
                     </a:lnL>
                     <a:lnR w="9525" cap="flat" cmpd="sng" algn="ctr">
                       <a:solidFill>
-                        <a:srgbClr val="B8A41E"/>
+                        <a:srgbClr val="DFC93A"/>
                       </a:solidFill>
                       <a:prstDash val="solid"/>
                     </a:lnR>
                     <a:lnT w="9525" cap="flat" cmpd="sng" algn="ctr">
                       <a:solidFill>
-                        <a:srgbClr val="B8A41E"/>
+                        <a:srgbClr val="DFC93A"/>
                       </a:solidFill>
                       <a:prstDash val="solid"/>
                     </a:lnT>
                     <a:lnB w="9525" cap="flat" cmpd="sng" algn="ctr">
                       <a:solidFill>
-                        <a:srgbClr val="B8A41E"/>
+                        <a:srgbClr val="DFC93A"/>
                       </a:solidFill>
                       <a:prstDash val="solid"/>
                     </a:lnB>
                     <a:solidFill>
-                      <a:srgbClr val="B8A41E"/>
+                      <a:srgbClr val="DFC93A"/>
                     </a:solidFill>
                   </a:tcPr>
                 </a:tc>
@@ -4496,30 +4496,30 @@
                   <a:tcPr anchor="ctr" marL="73152" marR="73152">
                     <a:lnL w="9525" cap="flat" cmpd="sng" algn="ctr">
                       <a:solidFill>
-                        <a:srgbClr val="B8A41E"/>
+                        <a:srgbClr val="DFC93A"/>
                       </a:solidFill>
                       <a:prstDash val="solid"/>
                     </a:lnL>
                     <a:lnR w="9525" cap="flat" cmpd="sng" algn="ctr">
                       <a:solidFill>
-                        <a:srgbClr val="B8A41E"/>
+                        <a:srgbClr val="DFC93A"/>
                       </a:solidFill>
                       <a:prstDash val="solid"/>
                     </a:lnR>
                     <a:lnT w="9525" cap="flat" cmpd="sng" algn="ctr">
                       <a:solidFill>
-                        <a:srgbClr val="B8A41E"/>
+                        <a:srgbClr val="DFC93A"/>
                       </a:solidFill>
                       <a:prstDash val="solid"/>
                     </a:lnT>
                     <a:lnB w="9525" cap="flat" cmpd="sng" algn="ctr">
                       <a:solidFill>
-                        <a:srgbClr val="B8A41E"/>
+                        <a:srgbClr val="DFC93A"/>
                       </a:solidFill>
                       <a:prstDash val="solid"/>
                     </a:lnB>
                     <a:solidFill>
-                      <a:srgbClr val="B8A41E"/>
+                      <a:srgbClr val="DFC93A"/>
                     </a:solidFill>
                   </a:tcPr>
                 </a:tc>
@@ -4542,30 +4542,30 @@
                   <a:tcPr anchor="ctr" marL="73152" marR="73152">
                     <a:lnL w="9525" cap="flat" cmpd="sng" algn="ctr">
                       <a:solidFill>
-                        <a:srgbClr val="B8A41E"/>
+                        <a:srgbClr val="DFC93A"/>
                       </a:solidFill>
                       <a:prstDash val="solid"/>
                     </a:lnL>
                     <a:lnR w="9525" cap="flat" cmpd="sng" algn="ctr">
                       <a:solidFill>
-                        <a:srgbClr val="B8A41E"/>
+                        <a:srgbClr val="DFC93A"/>
                       </a:solidFill>
                       <a:prstDash val="solid"/>
                     </a:lnR>
                     <a:lnT w="9525" cap="flat" cmpd="sng" algn="ctr">
                       <a:solidFill>
-                        <a:srgbClr val="B8A41E"/>
+                        <a:srgbClr val="DFC93A"/>
                       </a:solidFill>
                       <a:prstDash val="solid"/>
                     </a:lnT>
                     <a:lnB w="9525" cap="flat" cmpd="sng" algn="ctr">
                       <a:solidFill>
-                        <a:srgbClr val="B8A41E"/>
+                        <a:srgbClr val="DFC93A"/>
                       </a:solidFill>
                       <a:prstDash val="solid"/>
                     </a:lnB>
                     <a:solidFill>
-                      <a:srgbClr val="B8A41E"/>
+                      <a:srgbClr val="DFC93A"/>
                     </a:solidFill>
                   </a:tcPr>
                 </a:tc>
@@ -4588,30 +4588,30 @@
                   <a:tcPr anchor="ctr" marL="73152" marR="73152">
                     <a:lnL w="9525" cap="flat" cmpd="sng" algn="ctr">
                       <a:solidFill>
-                        <a:srgbClr val="B8A41E"/>
+                        <a:srgbClr val="DFC93A"/>
                       </a:solidFill>
                       <a:prstDash val="solid"/>
                     </a:lnL>
                     <a:lnR w="9525" cap="flat" cmpd="sng" algn="ctr">
                       <a:solidFill>
-                        <a:srgbClr val="B8A41E"/>
+                        <a:srgbClr val="DFC93A"/>
                       </a:solidFill>
                       <a:prstDash val="solid"/>
                     </a:lnR>
                     <a:lnT w="9525" cap="flat" cmpd="sng" algn="ctr">
                       <a:solidFill>
-                        <a:srgbClr val="B8A41E"/>
+                        <a:srgbClr val="DFC93A"/>
                       </a:solidFill>
                       <a:prstDash val="solid"/>
                     </a:lnT>
                     <a:lnB w="9525" cap="flat" cmpd="sng" algn="ctr">
                       <a:solidFill>
-                        <a:srgbClr val="B8A41E"/>
+                        <a:srgbClr val="DFC93A"/>
                       </a:solidFill>
                       <a:prstDash val="solid"/>
                     </a:lnB>
                     <a:solidFill>
-                      <a:srgbClr val="B8A41E"/>
+                      <a:srgbClr val="DFC93A"/>
                     </a:solidFill>
                   </a:tcPr>
                 </a:tc>
@@ -4636,25 +4636,25 @@
                   <a:tcPr anchor="ctr" marL="73152" marR="73152">
                     <a:lnL w="9525" cap="flat" cmpd="sng" algn="ctr">
                       <a:solidFill>
-                        <a:srgbClr val="F8F2C9"/>
+                        <a:srgbClr val="F7F3D4"/>
                       </a:solidFill>
                       <a:prstDash val="solid"/>
                     </a:lnL>
                     <a:lnR w="9525" cap="flat" cmpd="sng" algn="ctr">
                       <a:solidFill>
-                        <a:srgbClr val="F8F2C9"/>
+                        <a:srgbClr val="F7F3D4"/>
                       </a:solidFill>
                       <a:prstDash val="solid"/>
                     </a:lnR>
                     <a:lnT w="9525" cap="flat" cmpd="sng" algn="ctr">
                       <a:solidFill>
-                        <a:srgbClr val="F8F2C9"/>
+                        <a:srgbClr val="F7F3D4"/>
                       </a:solidFill>
                       <a:prstDash val="solid"/>
                     </a:lnT>
                     <a:lnB w="9525" cap="flat" cmpd="sng" algn="ctr">
                       <a:solidFill>
-                        <a:srgbClr val="F8F2C9"/>
+                        <a:srgbClr val="F7F3D4"/>
                       </a:solidFill>
                       <a:prstDash val="solid"/>
                     </a:lnB>
@@ -4682,25 +4682,25 @@
                   <a:tcPr anchor="ctr" marL="73152" marR="73152">
                     <a:lnL w="9525" cap="flat" cmpd="sng" algn="ctr">
                       <a:solidFill>
-                        <a:srgbClr val="F8F2C9"/>
+                        <a:srgbClr val="F7F3D4"/>
                       </a:solidFill>
                       <a:prstDash val="solid"/>
                     </a:lnL>
                     <a:lnR w="9525" cap="flat" cmpd="sng" algn="ctr">
                       <a:solidFill>
-                        <a:srgbClr val="F8F2C9"/>
+                        <a:srgbClr val="F7F3D4"/>
                       </a:solidFill>
                       <a:prstDash val="solid"/>
                     </a:lnR>
                     <a:lnT w="9525" cap="flat" cmpd="sng" algn="ctr">
                       <a:solidFill>
-                        <a:srgbClr val="F8F2C9"/>
+                        <a:srgbClr val="F7F3D4"/>
                       </a:solidFill>
                       <a:prstDash val="solid"/>
                     </a:lnT>
                     <a:lnB w="9525" cap="flat" cmpd="sng" algn="ctr">
                       <a:solidFill>
-                        <a:srgbClr val="F8F2C9"/>
+                        <a:srgbClr val="F7F3D4"/>
                       </a:solidFill>
                       <a:prstDash val="solid"/>
                     </a:lnB>
@@ -4728,25 +4728,25 @@
                   <a:tcPr anchor="ctr" marL="73152" marR="73152">
                     <a:lnL w="9525" cap="flat" cmpd="sng" algn="ctr">
                       <a:solidFill>
-                        <a:srgbClr val="F8F2C9"/>
+                        <a:srgbClr val="F7F3D4"/>
                       </a:solidFill>
                       <a:prstDash val="solid"/>
                     </a:lnL>
                     <a:lnR w="9525" cap="flat" cmpd="sng" algn="ctr">
                       <a:solidFill>
-                        <a:srgbClr val="F8F2C9"/>
+                        <a:srgbClr val="F7F3D4"/>
                       </a:solidFill>
                       <a:prstDash val="solid"/>
                     </a:lnR>
                     <a:lnT w="9525" cap="flat" cmpd="sng" algn="ctr">
                       <a:solidFill>
-                        <a:srgbClr val="F8F2C9"/>
+                        <a:srgbClr val="F7F3D4"/>
                       </a:solidFill>
                       <a:prstDash val="solid"/>
                     </a:lnT>
                     <a:lnB w="9525" cap="flat" cmpd="sng" algn="ctr">
                       <a:solidFill>
-                        <a:srgbClr val="F8F2C9"/>
+                        <a:srgbClr val="F7F3D4"/>
                       </a:solidFill>
                       <a:prstDash val="solid"/>
                     </a:lnB>
@@ -4774,25 +4774,25 @@
                   <a:tcPr anchor="ctr" marL="73152" marR="73152">
                     <a:lnL w="9525" cap="flat" cmpd="sng" algn="ctr">
                       <a:solidFill>
-                        <a:srgbClr val="F8F2C9"/>
+                        <a:srgbClr val="F7F3D4"/>
                       </a:solidFill>
                       <a:prstDash val="solid"/>
                     </a:lnL>
                     <a:lnR w="9525" cap="flat" cmpd="sng" algn="ctr">
                       <a:solidFill>
-                        <a:srgbClr val="F8F2C9"/>
+                        <a:srgbClr val="F7F3D4"/>
                       </a:solidFill>
                       <a:prstDash val="solid"/>
                     </a:lnR>
                     <a:lnT w="9525" cap="flat" cmpd="sng" algn="ctr">
                       <a:solidFill>
-                        <a:srgbClr val="F8F2C9"/>
+                        <a:srgbClr val="F7F3D4"/>
                       </a:solidFill>
                       <a:prstDash val="solid"/>
                     </a:lnT>
                     <a:lnB w="9525" cap="flat" cmpd="sng" algn="ctr">
                       <a:solidFill>
-                        <a:srgbClr val="F8F2C9"/>
+                        <a:srgbClr val="F7F3D4"/>
                       </a:solidFill>
                       <a:prstDash val="solid"/>
                     </a:lnB>
@@ -4820,25 +4820,25 @@
                   <a:tcPr anchor="ctr" marL="73152" marR="73152">
                     <a:lnL w="9525" cap="flat" cmpd="sng" algn="ctr">
                       <a:solidFill>
-                        <a:srgbClr val="F8F2C9"/>
+                        <a:srgbClr val="F7F3D4"/>
                       </a:solidFill>
                       <a:prstDash val="solid"/>
                     </a:lnL>
                     <a:lnR w="9525" cap="flat" cmpd="sng" algn="ctr">
                       <a:solidFill>
-                        <a:srgbClr val="F8F2C9"/>
+                        <a:srgbClr val="F7F3D4"/>
                       </a:solidFill>
                       <a:prstDash val="solid"/>
                     </a:lnR>
                     <a:lnT w="9525" cap="flat" cmpd="sng" algn="ctr">
                       <a:solidFill>
-                        <a:srgbClr val="F8F2C9"/>
+                        <a:srgbClr val="F7F3D4"/>
                       </a:solidFill>
                       <a:prstDash val="solid"/>
                     </a:lnT>
                     <a:lnB w="9525" cap="flat" cmpd="sng" algn="ctr">
                       <a:solidFill>
-                        <a:srgbClr val="F8F2C9"/>
+                        <a:srgbClr val="F7F3D4"/>
                       </a:solidFill>
                       <a:prstDash val="solid"/>
                     </a:lnB>
@@ -4868,30 +4868,30 @@
                   <a:tcPr anchor="ctr" marL="73152" marR="73152">
                     <a:lnL w="9525" cap="flat" cmpd="sng" algn="ctr">
                       <a:solidFill>
-                        <a:srgbClr val="F8F2C9"/>
+                        <a:srgbClr val="F7F3D4"/>
                       </a:solidFill>
                       <a:prstDash val="solid"/>
                     </a:lnL>
                     <a:lnR w="9525" cap="flat" cmpd="sng" algn="ctr">
                       <a:solidFill>
-                        <a:srgbClr val="F8F2C9"/>
+                        <a:srgbClr val="F7F3D4"/>
                       </a:solidFill>
                       <a:prstDash val="solid"/>
                     </a:lnR>
                     <a:lnT w="9525" cap="flat" cmpd="sng" algn="ctr">
                       <a:solidFill>
-                        <a:srgbClr val="F8F2C9"/>
+                        <a:srgbClr val="F7F3D4"/>
                       </a:solidFill>
                       <a:prstDash val="solid"/>
                     </a:lnT>
                     <a:lnB w="9525" cap="flat" cmpd="sng" algn="ctr">
                       <a:solidFill>
-                        <a:srgbClr val="F8F2C9"/>
+                        <a:srgbClr val="F7F3D4"/>
                       </a:solidFill>
                       <a:prstDash val="solid"/>
                     </a:lnB>
                     <a:solidFill>
-                      <a:srgbClr val="FCFAED"/>
+                      <a:srgbClr val="FCFBF3"/>
                     </a:solidFill>
                   </a:tcPr>
                 </a:tc>
@@ -4914,30 +4914,30 @@
                   <a:tcPr anchor="ctr" marL="73152" marR="73152">
                     <a:lnL w="9525" cap="flat" cmpd="sng" algn="ctr">
                       <a:solidFill>
-                        <a:srgbClr val="F8F2C9"/>
+                        <a:srgbClr val="F7F3D4"/>
                       </a:solidFill>
                       <a:prstDash val="solid"/>
                     </a:lnL>
                     <a:lnR w="9525" cap="flat" cmpd="sng" algn="ctr">
                       <a:solidFill>
-                        <a:srgbClr val="F8F2C9"/>
+                        <a:srgbClr val="F7F3D4"/>
                       </a:solidFill>
                       <a:prstDash val="solid"/>
                     </a:lnR>
                     <a:lnT w="9525" cap="flat" cmpd="sng" algn="ctr">
                       <a:solidFill>
-                        <a:srgbClr val="F8F2C9"/>
+                        <a:srgbClr val="F7F3D4"/>
                       </a:solidFill>
                       <a:prstDash val="solid"/>
                     </a:lnT>
                     <a:lnB w="9525" cap="flat" cmpd="sng" algn="ctr">
                       <a:solidFill>
-                        <a:srgbClr val="F8F2C9"/>
+                        <a:srgbClr val="F7F3D4"/>
                       </a:solidFill>
                       <a:prstDash val="solid"/>
                     </a:lnB>
                     <a:solidFill>
-                      <a:srgbClr val="FCFAED"/>
+                      <a:srgbClr val="FCFBF3"/>
                     </a:solidFill>
                   </a:tcPr>
                 </a:tc>
@@ -4960,30 +4960,30 @@
                   <a:tcPr anchor="ctr" marL="73152" marR="73152">
                     <a:lnL w="9525" cap="flat" cmpd="sng" algn="ctr">
                       <a:solidFill>
-                        <a:srgbClr val="F8F2C9"/>
+                        <a:srgbClr val="F7F3D4"/>
                       </a:solidFill>
                       <a:prstDash val="solid"/>
                     </a:lnL>
                     <a:lnR w="9525" cap="flat" cmpd="sng" algn="ctr">
                       <a:solidFill>
-                        <a:srgbClr val="F8F2C9"/>
+                        <a:srgbClr val="F7F3D4"/>
                       </a:solidFill>
                       <a:prstDash val="solid"/>
                     </a:lnR>
                     <a:lnT w="9525" cap="flat" cmpd="sng" algn="ctr">
                       <a:solidFill>
-                        <a:srgbClr val="F8F2C9"/>
+                        <a:srgbClr val="F7F3D4"/>
                       </a:solidFill>
                       <a:prstDash val="solid"/>
                     </a:lnT>
                     <a:lnB w="9525" cap="flat" cmpd="sng" algn="ctr">
                       <a:solidFill>
-                        <a:srgbClr val="F8F2C9"/>
+                        <a:srgbClr val="F7F3D4"/>
                       </a:solidFill>
                       <a:prstDash val="solid"/>
                     </a:lnB>
                     <a:solidFill>
-                      <a:srgbClr val="FCFAED"/>
+                      <a:srgbClr val="FCFBF3"/>
                     </a:solidFill>
                   </a:tcPr>
                 </a:tc>
@@ -5006,30 +5006,30 @@
                   <a:tcPr anchor="ctr" marL="73152" marR="73152">
                     <a:lnL w="9525" cap="flat" cmpd="sng" algn="ctr">
                       <a:solidFill>
-                        <a:srgbClr val="F8F2C9"/>
+                        <a:srgbClr val="F7F3D4"/>
                       </a:solidFill>
                       <a:prstDash val="solid"/>
                     </a:lnL>
                     <a:lnR w="9525" cap="flat" cmpd="sng" algn="ctr">
                       <a:solidFill>
-                        <a:srgbClr val="F8F2C9"/>
+                        <a:srgbClr val="F7F3D4"/>
                       </a:solidFill>
                       <a:prstDash val="solid"/>
                     </a:lnR>
                     <a:lnT w="9525" cap="flat" cmpd="sng" algn="ctr">
                       <a:solidFill>
-                        <a:srgbClr val="F8F2C9"/>
+                        <a:srgbClr val="F7F3D4"/>
                       </a:solidFill>
                       <a:prstDash val="solid"/>
                     </a:lnT>
                     <a:lnB w="9525" cap="flat" cmpd="sng" algn="ctr">
                       <a:solidFill>
-                        <a:srgbClr val="F8F2C9"/>
+                        <a:srgbClr val="F7F3D4"/>
                       </a:solidFill>
                       <a:prstDash val="solid"/>
                     </a:lnB>
                     <a:solidFill>
-                      <a:srgbClr val="FCFAED"/>
+                      <a:srgbClr val="FCFBF3"/>
                     </a:solidFill>
                   </a:tcPr>
                 </a:tc>
@@ -5052,30 +5052,30 @@
                   <a:tcPr anchor="ctr" marL="73152" marR="73152">
                     <a:lnL w="9525" cap="flat" cmpd="sng" algn="ctr">
                       <a:solidFill>
-                        <a:srgbClr val="F8F2C9"/>
+                        <a:srgbClr val="F7F3D4"/>
                       </a:solidFill>
                       <a:prstDash val="solid"/>
                     </a:lnL>
                     <a:lnR w="9525" cap="flat" cmpd="sng" algn="ctr">
                       <a:solidFill>
-                        <a:srgbClr val="F8F2C9"/>
+                        <a:srgbClr val="F7F3D4"/>
                       </a:solidFill>
                       <a:prstDash val="solid"/>
                     </a:lnR>
                     <a:lnT w="9525" cap="flat" cmpd="sng" algn="ctr">
                       <a:solidFill>
-                        <a:srgbClr val="F8F2C9"/>
+                        <a:srgbClr val="F7F3D4"/>
                       </a:solidFill>
                       <a:prstDash val="solid"/>
                     </a:lnT>
                     <a:lnB w="9525" cap="flat" cmpd="sng" algn="ctr">
                       <a:solidFill>
-                        <a:srgbClr val="F8F2C9"/>
+                        <a:srgbClr val="F7F3D4"/>
                       </a:solidFill>
                       <a:prstDash val="solid"/>
                     </a:lnB>
                     <a:solidFill>
-                      <a:srgbClr val="FCFAED"/>
+                      <a:srgbClr val="FCFBF3"/>
                     </a:solidFill>
                   </a:tcPr>
                 </a:tc>
@@ -5100,25 +5100,25 @@
                   <a:tcPr anchor="ctr" marL="73152" marR="73152">
                     <a:lnL w="9525" cap="flat" cmpd="sng" algn="ctr">
                       <a:solidFill>
-                        <a:srgbClr val="F8F2C9"/>
+                        <a:srgbClr val="F7F3D4"/>
                       </a:solidFill>
                       <a:prstDash val="solid"/>
                     </a:lnL>
                     <a:lnR w="9525" cap="flat" cmpd="sng" algn="ctr">
                       <a:solidFill>
-                        <a:srgbClr val="F8F2C9"/>
+                        <a:srgbClr val="F7F3D4"/>
                       </a:solidFill>
                       <a:prstDash val="solid"/>
                     </a:lnR>
                     <a:lnT w="9525" cap="flat" cmpd="sng" algn="ctr">
                       <a:solidFill>
-                        <a:srgbClr val="F8F2C9"/>
+                        <a:srgbClr val="F7F3D4"/>
                       </a:solidFill>
                       <a:prstDash val="solid"/>
                     </a:lnT>
                     <a:lnB w="9525" cap="flat" cmpd="sng" algn="ctr">
                       <a:solidFill>
-                        <a:srgbClr val="F8F2C9"/>
+                        <a:srgbClr val="F7F3D4"/>
                       </a:solidFill>
                       <a:prstDash val="solid"/>
                     </a:lnB>
@@ -5146,25 +5146,25 @@
                   <a:tcPr anchor="ctr" marL="73152" marR="73152">
                     <a:lnL w="9525" cap="flat" cmpd="sng" algn="ctr">
                       <a:solidFill>
-                        <a:srgbClr val="F8F2C9"/>
+                        <a:srgbClr val="F7F3D4"/>
                       </a:solidFill>
                       <a:prstDash val="solid"/>
                     </a:lnL>
                     <a:lnR w="9525" cap="flat" cmpd="sng" algn="ctr">
                       <a:solidFill>
-                        <a:srgbClr val="F8F2C9"/>
+                        <a:srgbClr val="F7F3D4"/>
                       </a:solidFill>
                       <a:prstDash val="solid"/>
                     </a:lnR>
                     <a:lnT w="9525" cap="flat" cmpd="sng" algn="ctr">
                       <a:solidFill>
-                        <a:srgbClr val="F8F2C9"/>
+                        <a:srgbClr val="F7F3D4"/>
                       </a:solidFill>
                       <a:prstDash val="solid"/>
                     </a:lnT>
                     <a:lnB w="9525" cap="flat" cmpd="sng" algn="ctr">
                       <a:solidFill>
-                        <a:srgbClr val="F8F2C9"/>
+                        <a:srgbClr val="F7F3D4"/>
                       </a:solidFill>
                       <a:prstDash val="solid"/>
                     </a:lnB>
@@ -5192,25 +5192,25 @@
                   <a:tcPr anchor="ctr" marL="73152" marR="73152">
                     <a:lnL w="9525" cap="flat" cmpd="sng" algn="ctr">
                       <a:solidFill>
-                        <a:srgbClr val="F8F2C9"/>
+                        <a:srgbClr val="F7F3D4"/>
                       </a:solidFill>
                       <a:prstDash val="solid"/>
                     </a:lnL>
                     <a:lnR w="9525" cap="flat" cmpd="sng" algn="ctr">
                       <a:solidFill>
-                        <a:srgbClr val="F8F2C9"/>
+                        <a:srgbClr val="F7F3D4"/>
                       </a:solidFill>
                       <a:prstDash val="solid"/>
                     </a:lnR>
                     <a:lnT w="9525" cap="flat" cmpd="sng" algn="ctr">
                       <a:solidFill>
-                        <a:srgbClr val="F8F2C9"/>
+                        <a:srgbClr val="F7F3D4"/>
                       </a:solidFill>
                       <a:prstDash val="solid"/>
                     </a:lnT>
                     <a:lnB w="9525" cap="flat" cmpd="sng" algn="ctr">
                       <a:solidFill>
-                        <a:srgbClr val="F8F2C9"/>
+                        <a:srgbClr val="F7F3D4"/>
                       </a:solidFill>
                       <a:prstDash val="solid"/>
                     </a:lnB>
@@ -5238,25 +5238,25 @@
                   <a:tcPr anchor="ctr" marL="73152" marR="73152">
                     <a:lnL w="9525" cap="flat" cmpd="sng" algn="ctr">
                       <a:solidFill>
-                        <a:srgbClr val="F8F2C9"/>
+                        <a:srgbClr val="F7F3D4"/>
                       </a:solidFill>
                       <a:prstDash val="solid"/>
                     </a:lnL>
                     <a:lnR w="9525" cap="flat" cmpd="sng" algn="ctr">
                       <a:solidFill>
-                        <a:srgbClr val="F8F2C9"/>
+                        <a:srgbClr val="F7F3D4"/>
                       </a:solidFill>
                       <a:prstDash val="solid"/>
                     </a:lnR>
                     <a:lnT w="9525" cap="flat" cmpd="sng" algn="ctr">
                       <a:solidFill>
-                        <a:srgbClr val="F8F2C9"/>
+                        <a:srgbClr val="F7F3D4"/>
                       </a:solidFill>
                       <a:prstDash val="solid"/>
                     </a:lnT>
                     <a:lnB w="9525" cap="flat" cmpd="sng" algn="ctr">
                       <a:solidFill>
-                        <a:srgbClr val="F8F2C9"/>
+                        <a:srgbClr val="F7F3D4"/>
                       </a:solidFill>
                       <a:prstDash val="solid"/>
                     </a:lnB>
@@ -5284,25 +5284,25 @@
                   <a:tcPr anchor="ctr" marL="73152" marR="73152">
                     <a:lnL w="9525" cap="flat" cmpd="sng" algn="ctr">
                       <a:solidFill>
-                        <a:srgbClr val="F8F2C9"/>
+                        <a:srgbClr val="F7F3D4"/>
                       </a:solidFill>
                       <a:prstDash val="solid"/>
                     </a:lnL>
                     <a:lnR w="9525" cap="flat" cmpd="sng" algn="ctr">
                       <a:solidFill>
-                        <a:srgbClr val="F8F2C9"/>
+                        <a:srgbClr val="F7F3D4"/>
                       </a:solidFill>
                       <a:prstDash val="solid"/>
                     </a:lnR>
                     <a:lnT w="9525" cap="flat" cmpd="sng" algn="ctr">
                       <a:solidFill>
-                        <a:srgbClr val="F8F2C9"/>
+                        <a:srgbClr val="F7F3D4"/>
                       </a:solidFill>
                       <a:prstDash val="solid"/>
                     </a:lnT>
                     <a:lnB w="9525" cap="flat" cmpd="sng" algn="ctr">
                       <a:solidFill>
-                        <a:srgbClr val="F8F2C9"/>
+                        <a:srgbClr val="F7F3D4"/>
                       </a:solidFill>
                       <a:prstDash val="solid"/>
                     </a:lnB>
@@ -5332,30 +5332,30 @@
                   <a:tcPr anchor="ctr" marL="73152" marR="73152">
                     <a:lnL w="9525" cap="flat" cmpd="sng" algn="ctr">
                       <a:solidFill>
-                        <a:srgbClr val="F8F2C9"/>
+                        <a:srgbClr val="F7F3D4"/>
                       </a:solidFill>
                       <a:prstDash val="solid"/>
                     </a:lnL>
                     <a:lnR w="9525" cap="flat" cmpd="sng" algn="ctr">
                       <a:solidFill>
-                        <a:srgbClr val="F8F2C9"/>
+                        <a:srgbClr val="F7F3D4"/>
                       </a:solidFill>
                       <a:prstDash val="solid"/>
                     </a:lnR>
                     <a:lnT w="9525" cap="flat" cmpd="sng" algn="ctr">
                       <a:solidFill>
-                        <a:srgbClr val="F8F2C9"/>
+                        <a:srgbClr val="F7F3D4"/>
                       </a:solidFill>
                       <a:prstDash val="solid"/>
                     </a:lnT>
                     <a:lnB w="9525" cap="flat" cmpd="sng" algn="ctr">
                       <a:solidFill>
-                        <a:srgbClr val="F8F2C9"/>
+                        <a:srgbClr val="F7F3D4"/>
                       </a:solidFill>
                       <a:prstDash val="solid"/>
                     </a:lnB>
                     <a:solidFill>
-                      <a:srgbClr val="FCFAED"/>
+                      <a:srgbClr val="FCFBF3"/>
                     </a:solidFill>
                   </a:tcPr>
                 </a:tc>
@@ -5378,30 +5378,30 @@
                   <a:tcPr anchor="ctr" marL="73152" marR="73152">
                     <a:lnL w="9525" cap="flat" cmpd="sng" algn="ctr">
                       <a:solidFill>
-                        <a:srgbClr val="F8F2C9"/>
+                        <a:srgbClr val="F7F3D4"/>
                       </a:solidFill>
                       <a:prstDash val="solid"/>
                     </a:lnL>
                     <a:lnR w="9525" cap="flat" cmpd="sng" algn="ctr">
                       <a:solidFill>
-                        <a:srgbClr val="F8F2C9"/>
+                        <a:srgbClr val="F7F3D4"/>
                       </a:solidFill>
                       <a:prstDash val="solid"/>
                     </a:lnR>
                     <a:lnT w="9525" cap="flat" cmpd="sng" algn="ctr">
                       <a:solidFill>
-                        <a:srgbClr val="F8F2C9"/>
+                        <a:srgbClr val="F7F3D4"/>
                       </a:solidFill>
                       <a:prstDash val="solid"/>
                     </a:lnT>
                     <a:lnB w="9525" cap="flat" cmpd="sng" algn="ctr">
                       <a:solidFill>
-                        <a:srgbClr val="F8F2C9"/>
+                        <a:srgbClr val="F7F3D4"/>
                       </a:solidFill>
                       <a:prstDash val="solid"/>
                     </a:lnB>
                     <a:solidFill>
-                      <a:srgbClr val="FCFAED"/>
+                      <a:srgbClr val="FCFBF3"/>
                     </a:solidFill>
                   </a:tcPr>
                 </a:tc>
@@ -5424,30 +5424,30 @@
                   <a:tcPr anchor="ctr" marL="73152" marR="73152">
                     <a:lnL w="9525" cap="flat" cmpd="sng" algn="ctr">
                       <a:solidFill>
-                        <a:srgbClr val="F8F2C9"/>
+                        <a:srgbClr val="F7F3D4"/>
                       </a:solidFill>
                       <a:prstDash val="solid"/>
                     </a:lnL>
                     <a:lnR w="9525" cap="flat" cmpd="sng" algn="ctr">
                       <a:solidFill>
-                        <a:srgbClr val="F8F2C9"/>
+                        <a:srgbClr val="F7F3D4"/>
                       </a:solidFill>
                       <a:prstDash val="solid"/>
                     </a:lnR>
                     <a:lnT w="9525" cap="flat" cmpd="sng" algn="ctr">
                       <a:solidFill>
-                        <a:srgbClr val="F8F2C9"/>
+                        <a:srgbClr val="F7F3D4"/>
                       </a:solidFill>
                       <a:prstDash val="solid"/>
                     </a:lnT>
                     <a:lnB w="9525" cap="flat" cmpd="sng" algn="ctr">
                       <a:solidFill>
-                        <a:srgbClr val="F8F2C9"/>
+                        <a:srgbClr val="F7F3D4"/>
                       </a:solidFill>
                       <a:prstDash val="solid"/>
                     </a:lnB>
                     <a:solidFill>
-                      <a:srgbClr val="FCFAED"/>
+                      <a:srgbClr val="FCFBF3"/>
                     </a:solidFill>
                   </a:tcPr>
                 </a:tc>
@@ -5470,30 +5470,30 @@
                   <a:tcPr anchor="ctr" marL="73152" marR="73152">
                     <a:lnL w="9525" cap="flat" cmpd="sng" algn="ctr">
                       <a:solidFill>
-                        <a:srgbClr val="F8F2C9"/>
+                        <a:srgbClr val="F7F3D4"/>
                       </a:solidFill>
                       <a:prstDash val="solid"/>
                     </a:lnL>
                     <a:lnR w="9525" cap="flat" cmpd="sng" algn="ctr">
                       <a:solidFill>
-                        <a:srgbClr val="F8F2C9"/>
+                        <a:srgbClr val="F7F3D4"/>
                       </a:solidFill>
                       <a:prstDash val="solid"/>
                     </a:lnR>
                     <a:lnT w="9525" cap="flat" cmpd="sng" algn="ctr">
                       <a:solidFill>
-                        <a:srgbClr val="F8F2C9"/>
+                        <a:srgbClr val="F7F3D4"/>
                       </a:solidFill>
                       <a:prstDash val="solid"/>
                     </a:lnT>
                     <a:lnB w="9525" cap="flat" cmpd="sng" algn="ctr">
                       <a:solidFill>
-                        <a:srgbClr val="F8F2C9"/>
+                        <a:srgbClr val="F7F3D4"/>
                       </a:solidFill>
                       <a:prstDash val="solid"/>
                     </a:lnB>
                     <a:solidFill>
-                      <a:srgbClr val="FCFAED"/>
+                      <a:srgbClr val="FCFBF3"/>
                     </a:solidFill>
                   </a:tcPr>
                 </a:tc>
@@ -5516,30 +5516,30 @@
                   <a:tcPr anchor="ctr" marL="73152" marR="73152">
                     <a:lnL w="9525" cap="flat" cmpd="sng" algn="ctr">
                       <a:solidFill>
-                        <a:srgbClr val="F8F2C9"/>
+                        <a:srgbClr val="F7F3D4"/>
                       </a:solidFill>
                       <a:prstDash val="solid"/>
                     </a:lnL>
                     <a:lnR w="9525" cap="flat" cmpd="sng" algn="ctr">
                       <a:solidFill>
-                        <a:srgbClr val="F8F2C9"/>
+                        <a:srgbClr val="F7F3D4"/>
                       </a:solidFill>
                       <a:prstDash val="solid"/>
                     </a:lnR>
                     <a:lnT w="9525" cap="flat" cmpd="sng" algn="ctr">
                       <a:solidFill>
-                        <a:srgbClr val="F8F2C9"/>
+                        <a:srgbClr val="F7F3D4"/>
                       </a:solidFill>
                       <a:prstDash val="solid"/>
                     </a:lnT>
                     <a:lnB w="9525" cap="flat" cmpd="sng" algn="ctr">
                       <a:solidFill>
-                        <a:srgbClr val="F8F2C9"/>
+                        <a:srgbClr val="F7F3D4"/>
                       </a:solidFill>
                       <a:prstDash val="solid"/>
                     </a:lnB>
                     <a:solidFill>
-                      <a:srgbClr val="FCFAED"/>
+                      <a:srgbClr val="FCFBF3"/>
                     </a:solidFill>
                   </a:tcPr>
                 </a:tc>
@@ -5564,25 +5564,25 @@
                   <a:tcPr anchor="ctr" marL="73152" marR="73152">
                     <a:lnL w="9525" cap="flat" cmpd="sng" algn="ctr">
                       <a:solidFill>
-                        <a:srgbClr val="F8F2C9"/>
+                        <a:srgbClr val="F7F3D4"/>
                       </a:solidFill>
                       <a:prstDash val="solid"/>
                     </a:lnL>
                     <a:lnR w="9525" cap="flat" cmpd="sng" algn="ctr">
                       <a:solidFill>
-                        <a:srgbClr val="F8F2C9"/>
+                        <a:srgbClr val="F7F3D4"/>
                       </a:solidFill>
                       <a:prstDash val="solid"/>
                     </a:lnR>
                     <a:lnT w="9525" cap="flat" cmpd="sng" algn="ctr">
                       <a:solidFill>
-                        <a:srgbClr val="F8F2C9"/>
+                        <a:srgbClr val="F7F3D4"/>
                       </a:solidFill>
                       <a:prstDash val="solid"/>
                     </a:lnT>
                     <a:lnB w="9525" cap="flat" cmpd="sng" algn="ctr">
                       <a:solidFill>
-                        <a:srgbClr val="F8F2C9"/>
+                        <a:srgbClr val="F7F3D4"/>
                       </a:solidFill>
                       <a:prstDash val="solid"/>
                     </a:lnB>
@@ -5610,25 +5610,25 @@
                   <a:tcPr anchor="ctr" marL="73152" marR="73152">
                     <a:lnL w="9525" cap="flat" cmpd="sng" algn="ctr">
                       <a:solidFill>
-                        <a:srgbClr val="F8F2C9"/>
+                        <a:srgbClr val="F7F3D4"/>
                       </a:solidFill>
                       <a:prstDash val="solid"/>
                     </a:lnL>
                     <a:lnR w="9525" cap="flat" cmpd="sng" algn="ctr">
                       <a:solidFill>
-                        <a:srgbClr val="F8F2C9"/>
+                        <a:srgbClr val="F7F3D4"/>
                       </a:solidFill>
                       <a:prstDash val="solid"/>
                     </a:lnR>
                     <a:lnT w="9525" cap="flat" cmpd="sng" algn="ctr">
                       <a:solidFill>
-                        <a:srgbClr val="F8F2C9"/>
+                        <a:srgbClr val="F7F3D4"/>
                       </a:solidFill>
                       <a:prstDash val="solid"/>
                     </a:lnT>
                     <a:lnB w="9525" cap="flat" cmpd="sng" algn="ctr">
                       <a:solidFill>
-                        <a:srgbClr val="F8F2C9"/>
+                        <a:srgbClr val="F7F3D4"/>
                       </a:solidFill>
                       <a:prstDash val="solid"/>
                     </a:lnB>
@@ -5656,25 +5656,25 @@
                   <a:tcPr anchor="ctr" marL="73152" marR="73152">
                     <a:lnL w="9525" cap="flat" cmpd="sng" algn="ctr">
                       <a:solidFill>
-                        <a:srgbClr val="F8F2C9"/>
+                        <a:srgbClr val="F7F3D4"/>
                       </a:solidFill>
                       <a:prstDash val="solid"/>
                     </a:lnL>
                     <a:lnR w="9525" cap="flat" cmpd="sng" algn="ctr">
                       <a:solidFill>
-                        <a:srgbClr val="F8F2C9"/>
+                        <a:srgbClr val="F7F3D4"/>
                       </a:solidFill>
                       <a:prstDash val="solid"/>
                     </a:lnR>
                     <a:lnT w="9525" cap="flat" cmpd="sng" algn="ctr">
                       <a:solidFill>
-                        <a:srgbClr val="F8F2C9"/>
+                        <a:srgbClr val="F7F3D4"/>
                       </a:solidFill>
                       <a:prstDash val="solid"/>
                     </a:lnT>
                     <a:lnB w="9525" cap="flat" cmpd="sng" algn="ctr">
                       <a:solidFill>
-                        <a:srgbClr val="F8F2C9"/>
+                        <a:srgbClr val="F7F3D4"/>
                       </a:solidFill>
                       <a:prstDash val="solid"/>
                     </a:lnB>
@@ -5702,25 +5702,25 @@
                   <a:tcPr anchor="ctr" marL="73152" marR="73152">
                     <a:lnL w="9525" cap="flat" cmpd="sng" algn="ctr">
                       <a:solidFill>
-                        <a:srgbClr val="F8F2C9"/>
+                        <a:srgbClr val="F7F3D4"/>
                       </a:solidFill>
                       <a:prstDash val="solid"/>
                     </a:lnL>
                     <a:lnR w="9525" cap="flat" cmpd="sng" algn="ctr">
                       <a:solidFill>
-                        <a:srgbClr val="F8F2C9"/>
+                        <a:srgbClr val="F7F3D4"/>
                       </a:solidFill>
                       <a:prstDash val="solid"/>
                     </a:lnR>
                     <a:lnT w="9525" cap="flat" cmpd="sng" algn="ctr">
                       <a:solidFill>
-                        <a:srgbClr val="F8F2C9"/>
+                        <a:srgbClr val="F7F3D4"/>
                       </a:solidFill>
                       <a:prstDash val="solid"/>
                     </a:lnT>
                     <a:lnB w="9525" cap="flat" cmpd="sng" algn="ctr">
                       <a:solidFill>
-                        <a:srgbClr val="F8F2C9"/>
+                        <a:srgbClr val="F7F3D4"/>
                       </a:solidFill>
                       <a:prstDash val="solid"/>
                     </a:lnB>
@@ -5748,25 +5748,25 @@
                   <a:tcPr anchor="ctr" marL="73152" marR="73152">
                     <a:lnL w="9525" cap="flat" cmpd="sng" algn="ctr">
                       <a:solidFill>
-                        <a:srgbClr val="F8F2C9"/>
+                        <a:srgbClr val="F7F3D4"/>
                       </a:solidFill>
                       <a:prstDash val="solid"/>
                     </a:lnL>
                     <a:lnR w="9525" cap="flat" cmpd="sng" algn="ctr">
                       <a:solidFill>
-                        <a:srgbClr val="F8F2C9"/>
+                        <a:srgbClr val="F7F3D4"/>
                       </a:solidFill>
                       <a:prstDash val="solid"/>
                     </a:lnR>
                     <a:lnT w="9525" cap="flat" cmpd="sng" algn="ctr">
                       <a:solidFill>
-                        <a:srgbClr val="F8F2C9"/>
+                        <a:srgbClr val="F7F3D4"/>
                       </a:solidFill>
                       <a:prstDash val="solid"/>
                     </a:lnT>
                     <a:lnB w="9525" cap="flat" cmpd="sng" algn="ctr">
                       <a:solidFill>
-                        <a:srgbClr val="F8F2C9"/>
+                        <a:srgbClr val="F7F3D4"/>
                       </a:solidFill>
                       <a:prstDash val="solid"/>
                     </a:lnB>
@@ -5796,30 +5796,30 @@
                   <a:tcPr anchor="ctr" marL="73152" marR="73152">
                     <a:lnL w="9525" cap="flat" cmpd="sng" algn="ctr">
                       <a:solidFill>
-                        <a:srgbClr val="F8F2C9"/>
+                        <a:srgbClr val="F7F3D4"/>
                       </a:solidFill>
                       <a:prstDash val="solid"/>
                     </a:lnL>
                     <a:lnR w="9525" cap="flat" cmpd="sng" algn="ctr">
                       <a:solidFill>
-                        <a:srgbClr val="F8F2C9"/>
+                        <a:srgbClr val="F7F3D4"/>
                       </a:solidFill>
                       <a:prstDash val="solid"/>
                     </a:lnR>
                     <a:lnT w="9525" cap="flat" cmpd="sng" algn="ctr">
                       <a:solidFill>
-                        <a:srgbClr val="F8F2C9"/>
+                        <a:srgbClr val="F7F3D4"/>
                       </a:solidFill>
                       <a:prstDash val="solid"/>
                     </a:lnT>
                     <a:lnB w="9525" cap="flat" cmpd="sng" algn="ctr">
                       <a:solidFill>
-                        <a:srgbClr val="F8F2C9"/>
+                        <a:srgbClr val="F7F3D4"/>
                       </a:solidFill>
                       <a:prstDash val="solid"/>
                     </a:lnB>
                     <a:solidFill>
-                      <a:srgbClr val="FCFAED"/>
+                      <a:srgbClr val="FCFBF3"/>
                     </a:solidFill>
                   </a:tcPr>
                 </a:tc>
@@ -5842,30 +5842,30 @@
                   <a:tcPr anchor="ctr" marL="73152" marR="73152">
                     <a:lnL w="9525" cap="flat" cmpd="sng" algn="ctr">
                       <a:solidFill>
-                        <a:srgbClr val="F8F2C9"/>
+                        <a:srgbClr val="F7F3D4"/>
                       </a:solidFill>
                       <a:prstDash val="solid"/>
                     </a:lnL>
                     <a:lnR w="9525" cap="flat" cmpd="sng" algn="ctr">
                       <a:solidFill>
-                        <a:srgbClr val="F8F2C9"/>
+                        <a:srgbClr val="F7F3D4"/>
                       </a:solidFill>
                       <a:prstDash val="solid"/>
                     </a:lnR>
                     <a:lnT w="9525" cap="flat" cmpd="sng" algn="ctr">
                       <a:solidFill>
-                        <a:srgbClr val="F8F2C9"/>
+                        <a:srgbClr val="F7F3D4"/>
                       </a:solidFill>
                       <a:prstDash val="solid"/>
                     </a:lnT>
                     <a:lnB w="9525" cap="flat" cmpd="sng" algn="ctr">
                       <a:solidFill>
-                        <a:srgbClr val="F8F2C9"/>
+                        <a:srgbClr val="F7F3D4"/>
                       </a:solidFill>
                       <a:prstDash val="solid"/>
                     </a:lnB>
                     <a:solidFill>
-                      <a:srgbClr val="FCFAED"/>
+                      <a:srgbClr val="FCFBF3"/>
                     </a:solidFill>
                   </a:tcPr>
                 </a:tc>
@@ -5888,30 +5888,30 @@
                   <a:tcPr anchor="ctr" marL="73152" marR="73152">
                     <a:lnL w="9525" cap="flat" cmpd="sng" algn="ctr">
                       <a:solidFill>
-                        <a:srgbClr val="F8F2C9"/>
+                        <a:srgbClr val="F7F3D4"/>
                       </a:solidFill>
                       <a:prstDash val="solid"/>
                     </a:lnL>
                     <a:lnR w="9525" cap="flat" cmpd="sng" algn="ctr">
                       <a:solidFill>
-                        <a:srgbClr val="F8F2C9"/>
+                        <a:srgbClr val="F7F3D4"/>
                       </a:solidFill>
                       <a:prstDash val="solid"/>
                     </a:lnR>
                     <a:lnT w="9525" cap="flat" cmpd="sng" algn="ctr">
                       <a:solidFill>
-                        <a:srgbClr val="F8F2C9"/>
+                        <a:srgbClr val="F7F3D4"/>
                       </a:solidFill>
                       <a:prstDash val="solid"/>
                     </a:lnT>
                     <a:lnB w="9525" cap="flat" cmpd="sng" algn="ctr">
                       <a:solidFill>
-                        <a:srgbClr val="F8F2C9"/>
+                        <a:srgbClr val="F7F3D4"/>
                       </a:solidFill>
                       <a:prstDash val="solid"/>
                     </a:lnB>
                     <a:solidFill>
-                      <a:srgbClr val="FCFAED"/>
+                      <a:srgbClr val="FCFBF3"/>
                     </a:solidFill>
                   </a:tcPr>
                 </a:tc>
@@ -5934,30 +5934,30 @@
                   <a:tcPr anchor="ctr" marL="73152" marR="73152">
                     <a:lnL w="9525" cap="flat" cmpd="sng" algn="ctr">
                       <a:solidFill>
-                        <a:srgbClr val="F8F2C9"/>
+                        <a:srgbClr val="F7F3D4"/>
                       </a:solidFill>
                       <a:prstDash val="solid"/>
                     </a:lnL>
                     <a:lnR w="9525" cap="flat" cmpd="sng" algn="ctr">
                       <a:solidFill>
-                        <a:srgbClr val="F8F2C9"/>
+                        <a:srgbClr val="F7F3D4"/>
                       </a:solidFill>
                       <a:prstDash val="solid"/>
                     </a:lnR>
                     <a:lnT w="9525" cap="flat" cmpd="sng" algn="ctr">
                       <a:solidFill>
-                        <a:srgbClr val="F8F2C9"/>
+                        <a:srgbClr val="F7F3D4"/>
                       </a:solidFill>
                       <a:prstDash val="solid"/>
                     </a:lnT>
                     <a:lnB w="9525" cap="flat" cmpd="sng" algn="ctr">
                       <a:solidFill>
-                        <a:srgbClr val="F8F2C9"/>
+                        <a:srgbClr val="F7F3D4"/>
                       </a:solidFill>
                       <a:prstDash val="solid"/>
                     </a:lnB>
                     <a:solidFill>
-                      <a:srgbClr val="FCFAED"/>
+                      <a:srgbClr val="FCFBF3"/>
                     </a:solidFill>
                   </a:tcPr>
                 </a:tc>
@@ -5980,30 +5980,30 @@
                   <a:tcPr anchor="ctr" marL="73152" marR="73152">
                     <a:lnL w="9525" cap="flat" cmpd="sng" algn="ctr">
                       <a:solidFill>
-                        <a:srgbClr val="F8F2C9"/>
+                        <a:srgbClr val="F7F3D4"/>
                       </a:solidFill>
                       <a:prstDash val="solid"/>
                     </a:lnL>
                     <a:lnR w="9525" cap="flat" cmpd="sng" algn="ctr">
                       <a:solidFill>
-                        <a:srgbClr val="F8F2C9"/>
+                        <a:srgbClr val="F7F3D4"/>
                       </a:solidFill>
                       <a:prstDash val="solid"/>
                     </a:lnR>
                     <a:lnT w="9525" cap="flat" cmpd="sng" algn="ctr">
                       <a:solidFill>
-                        <a:srgbClr val="F8F2C9"/>
+                        <a:srgbClr val="F7F3D4"/>
                       </a:solidFill>
                       <a:prstDash val="solid"/>
                     </a:lnT>
                     <a:lnB w="9525" cap="flat" cmpd="sng" algn="ctr">
                       <a:solidFill>
-                        <a:srgbClr val="F8F2C9"/>
+                        <a:srgbClr val="F7F3D4"/>
                       </a:solidFill>
                       <a:prstDash val="solid"/>
                     </a:lnB>
                     <a:solidFill>
-                      <a:srgbClr val="FCFAED"/>
+                      <a:srgbClr val="FCFBF3"/>
                     </a:solidFill>
                   </a:tcPr>
                 </a:tc>
@@ -6053,7 +6053,7 @@
             <a:avLst/>
           </a:prstGeom>
           <a:solidFill>
-            <a:srgbClr val="B8A41E"/>
+            <a:srgbClr val="DFC93A"/>
           </a:solidFill>
           <a:ln>
             <a:noFill/>
@@ -6149,30 +6149,30 @@
                   <a:tcPr anchor="ctr" marL="73152" marR="73152">
                     <a:lnL w="9525" cap="flat" cmpd="sng" algn="ctr">
                       <a:solidFill>
-                        <a:srgbClr val="B8A41E"/>
+                        <a:srgbClr val="DFC93A"/>
                       </a:solidFill>
                       <a:prstDash val="solid"/>
                     </a:lnL>
                     <a:lnR w="9525" cap="flat" cmpd="sng" algn="ctr">
                       <a:solidFill>
-                        <a:srgbClr val="B8A41E"/>
+                        <a:srgbClr val="DFC93A"/>
                       </a:solidFill>
                       <a:prstDash val="solid"/>
                     </a:lnR>
                     <a:lnT w="9525" cap="flat" cmpd="sng" algn="ctr">
                       <a:solidFill>
-                        <a:srgbClr val="B8A41E"/>
+                        <a:srgbClr val="DFC93A"/>
                       </a:solidFill>
                       <a:prstDash val="solid"/>
                     </a:lnT>
                     <a:lnB w="9525" cap="flat" cmpd="sng" algn="ctr">
                       <a:solidFill>
-                        <a:srgbClr val="B8A41E"/>
+                        <a:srgbClr val="DFC93A"/>
                       </a:solidFill>
                       <a:prstDash val="solid"/>
                     </a:lnB>
                     <a:solidFill>
-                      <a:srgbClr val="B8A41E"/>
+                      <a:srgbClr val="DFC93A"/>
                     </a:solidFill>
                   </a:tcPr>
                 </a:tc>
@@ -6195,30 +6195,30 @@
                   <a:tcPr anchor="ctr" marL="73152" marR="73152">
                     <a:lnL w="9525" cap="flat" cmpd="sng" algn="ctr">
                       <a:solidFill>
-                        <a:srgbClr val="B8A41E"/>
+                        <a:srgbClr val="DFC93A"/>
                       </a:solidFill>
                       <a:prstDash val="solid"/>
                     </a:lnL>
                     <a:lnR w="9525" cap="flat" cmpd="sng" algn="ctr">
                       <a:solidFill>
-                        <a:srgbClr val="B8A41E"/>
+                        <a:srgbClr val="DFC93A"/>
                       </a:solidFill>
                       <a:prstDash val="solid"/>
                     </a:lnR>
                     <a:lnT w="9525" cap="flat" cmpd="sng" algn="ctr">
                       <a:solidFill>
-                        <a:srgbClr val="B8A41E"/>
+                        <a:srgbClr val="DFC93A"/>
                       </a:solidFill>
                       <a:prstDash val="solid"/>
                     </a:lnT>
                     <a:lnB w="9525" cap="flat" cmpd="sng" algn="ctr">
                       <a:solidFill>
-                        <a:srgbClr val="B8A41E"/>
+                        <a:srgbClr val="DFC93A"/>
                       </a:solidFill>
                       <a:prstDash val="solid"/>
                     </a:lnB>
                     <a:solidFill>
-                      <a:srgbClr val="B8A41E"/>
+                      <a:srgbClr val="DFC93A"/>
                     </a:solidFill>
                   </a:tcPr>
                 </a:tc>
@@ -6241,30 +6241,30 @@
                   <a:tcPr anchor="ctr" marL="73152" marR="73152">
                     <a:lnL w="9525" cap="flat" cmpd="sng" algn="ctr">
                       <a:solidFill>
-                        <a:srgbClr val="B8A41E"/>
+                        <a:srgbClr val="DFC93A"/>
                       </a:solidFill>
                       <a:prstDash val="solid"/>
                     </a:lnL>
                     <a:lnR w="9525" cap="flat" cmpd="sng" algn="ctr">
                       <a:solidFill>
-                        <a:srgbClr val="B8A41E"/>
+                        <a:srgbClr val="DFC93A"/>
                       </a:solidFill>
                       <a:prstDash val="solid"/>
                     </a:lnR>
                     <a:lnT w="9525" cap="flat" cmpd="sng" algn="ctr">
                       <a:solidFill>
-                        <a:srgbClr val="B8A41E"/>
+                        <a:srgbClr val="DFC93A"/>
                       </a:solidFill>
                       <a:prstDash val="solid"/>
                     </a:lnT>
                     <a:lnB w="9525" cap="flat" cmpd="sng" algn="ctr">
                       <a:solidFill>
-                        <a:srgbClr val="B8A41E"/>
+                        <a:srgbClr val="DFC93A"/>
                       </a:solidFill>
                       <a:prstDash val="solid"/>
                     </a:lnB>
                     <a:solidFill>
-                      <a:srgbClr val="B8A41E"/>
+                      <a:srgbClr val="DFC93A"/>
                     </a:solidFill>
                   </a:tcPr>
                 </a:tc>
@@ -6287,30 +6287,30 @@
                   <a:tcPr anchor="ctr" marL="73152" marR="73152">
                     <a:lnL w="9525" cap="flat" cmpd="sng" algn="ctr">
                       <a:solidFill>
-                        <a:srgbClr val="B8A41E"/>
+                        <a:srgbClr val="DFC93A"/>
                       </a:solidFill>
                       <a:prstDash val="solid"/>
                     </a:lnL>
                     <a:lnR w="9525" cap="flat" cmpd="sng" algn="ctr">
                       <a:solidFill>
-                        <a:srgbClr val="B8A41E"/>
+                        <a:srgbClr val="DFC93A"/>
                       </a:solidFill>
                       <a:prstDash val="solid"/>
                     </a:lnR>
                     <a:lnT w="9525" cap="flat" cmpd="sng" algn="ctr">
                       <a:solidFill>
-                        <a:srgbClr val="B8A41E"/>
+                        <a:srgbClr val="DFC93A"/>
                       </a:solidFill>
                       <a:prstDash val="solid"/>
                     </a:lnT>
                     <a:lnB w="9525" cap="flat" cmpd="sng" algn="ctr">
                       <a:solidFill>
-                        <a:srgbClr val="B8A41E"/>
+                        <a:srgbClr val="DFC93A"/>
                       </a:solidFill>
                       <a:prstDash val="solid"/>
                     </a:lnB>
                     <a:solidFill>
-                      <a:srgbClr val="B8A41E"/>
+                      <a:srgbClr val="DFC93A"/>
                     </a:solidFill>
                   </a:tcPr>
                 </a:tc>
@@ -6325,7 +6325,7 @@
                       <a:r>
                         <a:rPr sz="1400" b="1">
                           <a:solidFill>
-                            <a:srgbClr val="605610"/>
+                            <a:srgbClr val="72671D"/>
                           </a:solidFill>
                         </a:rPr>
                         <a:t>사망·재해</a:t>
@@ -6335,30 +6335,30 @@
                   <a:tcPr anchor="ctr" marL="73152" marR="73152">
                     <a:lnL w="9525" cap="flat" cmpd="sng" algn="ctr">
                       <a:solidFill>
-                        <a:srgbClr val="F8F2C9"/>
+                        <a:srgbClr val="F7F3D4"/>
                       </a:solidFill>
                       <a:prstDash val="solid"/>
                     </a:lnL>
                     <a:lnR w="9525" cap="flat" cmpd="sng" algn="ctr">
                       <a:solidFill>
-                        <a:srgbClr val="F8F2C9"/>
+                        <a:srgbClr val="F7F3D4"/>
                       </a:solidFill>
                       <a:prstDash val="solid"/>
                     </a:lnR>
                     <a:lnT w="9525" cap="flat" cmpd="sng" algn="ctr">
                       <a:solidFill>
-                        <a:srgbClr val="F8F2C9"/>
+                        <a:srgbClr val="F7F3D4"/>
                       </a:solidFill>
                       <a:prstDash val="solid"/>
                     </a:lnT>
                     <a:lnB w="9525" cap="flat" cmpd="sng" algn="ctr">
                       <a:solidFill>
-                        <a:srgbClr val="F8F2C9"/>
+                        <a:srgbClr val="F7F3D4"/>
                       </a:solidFill>
                       <a:prstDash val="solid"/>
                     </a:lnB>
                     <a:solidFill>
-                      <a:srgbClr val="F8F2C9"/>
+                      <a:srgbClr val="F7F3D4"/>
                     </a:solidFill>
                   </a:tcPr>
                 </a:tc>
@@ -6381,25 +6381,25 @@
                   <a:tcPr anchor="ctr" marL="73152" marR="73152">
                     <a:lnL w="9525" cap="flat" cmpd="sng" algn="ctr">
                       <a:solidFill>
-                        <a:srgbClr val="F8F2C9"/>
+                        <a:srgbClr val="F7F3D4"/>
                       </a:solidFill>
                       <a:prstDash val="solid"/>
                     </a:lnL>
                     <a:lnR w="9525" cap="flat" cmpd="sng" algn="ctr">
                       <a:solidFill>
-                        <a:srgbClr val="F8F2C9"/>
+                        <a:srgbClr val="F7F3D4"/>
                       </a:solidFill>
                       <a:prstDash val="solid"/>
                     </a:lnR>
                     <a:lnT w="9525" cap="flat" cmpd="sng" algn="ctr">
                       <a:solidFill>
-                        <a:srgbClr val="F8F2C9"/>
+                        <a:srgbClr val="F7F3D4"/>
                       </a:solidFill>
                       <a:prstDash val="solid"/>
                     </a:lnT>
                     <a:lnB w="9525" cap="flat" cmpd="sng" algn="ctr">
                       <a:solidFill>
-                        <a:srgbClr val="F8F2C9"/>
+                        <a:srgbClr val="F7F3D4"/>
                       </a:solidFill>
                       <a:prstDash val="solid"/>
                     </a:lnB>
@@ -6427,25 +6427,25 @@
                   <a:tcPr anchor="ctr" marL="73152" marR="73152">
                     <a:lnL w="9525" cap="flat" cmpd="sng" algn="ctr">
                       <a:solidFill>
-                        <a:srgbClr val="F8F2C9"/>
+                        <a:srgbClr val="F7F3D4"/>
                       </a:solidFill>
                       <a:prstDash val="solid"/>
                     </a:lnL>
                     <a:lnR w="9525" cap="flat" cmpd="sng" algn="ctr">
                       <a:solidFill>
-                        <a:srgbClr val="F8F2C9"/>
+                        <a:srgbClr val="F7F3D4"/>
                       </a:solidFill>
                       <a:prstDash val="solid"/>
                     </a:lnR>
                     <a:lnT w="9525" cap="flat" cmpd="sng" algn="ctr">
                       <a:solidFill>
-                        <a:srgbClr val="F8F2C9"/>
+                        <a:srgbClr val="F7F3D4"/>
                       </a:solidFill>
                       <a:prstDash val="solid"/>
                     </a:lnT>
                     <a:lnB w="9525" cap="flat" cmpd="sng" algn="ctr">
                       <a:solidFill>
-                        <a:srgbClr val="F8F2C9"/>
+                        <a:srgbClr val="F7F3D4"/>
                       </a:solidFill>
                       <a:prstDash val="solid"/>
                     </a:lnB>
@@ -6473,25 +6473,25 @@
                   <a:tcPr anchor="ctr" marL="73152" marR="73152">
                     <a:lnL w="9525" cap="flat" cmpd="sng" algn="ctr">
                       <a:solidFill>
-                        <a:srgbClr val="F8F2C9"/>
+                        <a:srgbClr val="F7F3D4"/>
                       </a:solidFill>
                       <a:prstDash val="solid"/>
                     </a:lnL>
                     <a:lnR w="9525" cap="flat" cmpd="sng" algn="ctr">
                       <a:solidFill>
-                        <a:srgbClr val="F8F2C9"/>
+                        <a:srgbClr val="F7F3D4"/>
                       </a:solidFill>
                       <a:prstDash val="solid"/>
                     </a:lnR>
                     <a:lnT w="9525" cap="flat" cmpd="sng" algn="ctr">
                       <a:solidFill>
-                        <a:srgbClr val="F8F2C9"/>
+                        <a:srgbClr val="F7F3D4"/>
                       </a:solidFill>
                       <a:prstDash val="solid"/>
                     </a:lnT>
                     <a:lnB w="9525" cap="flat" cmpd="sng" algn="ctr">
                       <a:solidFill>
-                        <a:srgbClr val="F8F2C9"/>
+                        <a:srgbClr val="F7F3D4"/>
                       </a:solidFill>
                       <a:prstDash val="solid"/>
                     </a:lnB>
@@ -6511,7 +6511,7 @@
                       <a:r>
                         <a:rPr sz="1400" b="1">
                           <a:solidFill>
-                            <a:srgbClr val="605610"/>
+                            <a:srgbClr val="72671D"/>
                           </a:solidFill>
                         </a:rPr>
                         <a:t>질병 진단</a:t>
@@ -6521,30 +6521,30 @@
                   <a:tcPr anchor="ctr" marL="73152" marR="73152">
                     <a:lnL w="9525" cap="flat" cmpd="sng" algn="ctr">
                       <a:solidFill>
-                        <a:srgbClr val="F8F2C9"/>
+                        <a:srgbClr val="F7F3D4"/>
                       </a:solidFill>
                       <a:prstDash val="solid"/>
                     </a:lnL>
                     <a:lnR w="9525" cap="flat" cmpd="sng" algn="ctr">
                       <a:solidFill>
-                        <a:srgbClr val="F8F2C9"/>
+                        <a:srgbClr val="F7F3D4"/>
                       </a:solidFill>
                       <a:prstDash val="solid"/>
                     </a:lnR>
                     <a:lnT w="9525" cap="flat" cmpd="sng" algn="ctr">
                       <a:solidFill>
-                        <a:srgbClr val="F8F2C9"/>
+                        <a:srgbClr val="F7F3D4"/>
                       </a:solidFill>
                       <a:prstDash val="solid"/>
                     </a:lnT>
                     <a:lnB w="9525" cap="flat" cmpd="sng" algn="ctr">
                       <a:solidFill>
-                        <a:srgbClr val="F8F2C9"/>
+                        <a:srgbClr val="F7F3D4"/>
                       </a:solidFill>
                       <a:prstDash val="solid"/>
                     </a:lnB>
                     <a:solidFill>
-                      <a:srgbClr val="F8F2C9"/>
+                      <a:srgbClr val="F7F3D4"/>
                     </a:solidFill>
                   </a:tcPr>
                 </a:tc>
@@ -6567,30 +6567,30 @@
                   <a:tcPr anchor="ctr" marL="73152" marR="73152">
                     <a:lnL w="9525" cap="flat" cmpd="sng" algn="ctr">
                       <a:solidFill>
-                        <a:srgbClr val="F8F2C9"/>
+                        <a:srgbClr val="F7F3D4"/>
                       </a:solidFill>
                       <a:prstDash val="solid"/>
                     </a:lnL>
                     <a:lnR w="9525" cap="flat" cmpd="sng" algn="ctr">
                       <a:solidFill>
-                        <a:srgbClr val="F8F2C9"/>
+                        <a:srgbClr val="F7F3D4"/>
                       </a:solidFill>
                       <a:prstDash val="solid"/>
                     </a:lnR>
                     <a:lnT w="9525" cap="flat" cmpd="sng" algn="ctr">
                       <a:solidFill>
-                        <a:srgbClr val="F8F2C9"/>
+                        <a:srgbClr val="F7F3D4"/>
                       </a:solidFill>
                       <a:prstDash val="solid"/>
                     </a:lnT>
                     <a:lnB w="9525" cap="flat" cmpd="sng" algn="ctr">
                       <a:solidFill>
-                        <a:srgbClr val="F8F2C9"/>
+                        <a:srgbClr val="F7F3D4"/>
                       </a:solidFill>
                       <a:prstDash val="solid"/>
                     </a:lnB>
                     <a:solidFill>
-                      <a:srgbClr val="FCFAED"/>
+                      <a:srgbClr val="FCFBF3"/>
                     </a:solidFill>
                   </a:tcPr>
                 </a:tc>
@@ -6613,30 +6613,30 @@
                   <a:tcPr anchor="ctr" marL="73152" marR="73152">
                     <a:lnL w="9525" cap="flat" cmpd="sng" algn="ctr">
                       <a:solidFill>
-                        <a:srgbClr val="F8F2C9"/>
+                        <a:srgbClr val="F7F3D4"/>
                       </a:solidFill>
                       <a:prstDash val="solid"/>
                     </a:lnL>
                     <a:lnR w="9525" cap="flat" cmpd="sng" algn="ctr">
                       <a:solidFill>
-                        <a:srgbClr val="F8F2C9"/>
+                        <a:srgbClr val="F7F3D4"/>
                       </a:solidFill>
                       <a:prstDash val="solid"/>
                     </a:lnR>
                     <a:lnT w="9525" cap="flat" cmpd="sng" algn="ctr">
                       <a:solidFill>
-                        <a:srgbClr val="F8F2C9"/>
+                        <a:srgbClr val="F7F3D4"/>
                       </a:solidFill>
                       <a:prstDash val="solid"/>
                     </a:lnT>
                     <a:lnB w="9525" cap="flat" cmpd="sng" algn="ctr">
                       <a:solidFill>
-                        <a:srgbClr val="F8F2C9"/>
+                        <a:srgbClr val="F7F3D4"/>
                       </a:solidFill>
                       <a:prstDash val="solid"/>
                     </a:lnB>
                     <a:solidFill>
-                      <a:srgbClr val="FCFAED"/>
+                      <a:srgbClr val="FCFBF3"/>
                     </a:solidFill>
                   </a:tcPr>
                 </a:tc>
@@ -6659,30 +6659,30 @@
                   <a:tcPr anchor="ctr" marL="73152" marR="73152">
                     <a:lnL w="9525" cap="flat" cmpd="sng" algn="ctr">
                       <a:solidFill>
-                        <a:srgbClr val="F8F2C9"/>
+                        <a:srgbClr val="F7F3D4"/>
                       </a:solidFill>
                       <a:prstDash val="solid"/>
                     </a:lnL>
                     <a:lnR w="9525" cap="flat" cmpd="sng" algn="ctr">
                       <a:solidFill>
-                        <a:srgbClr val="F8F2C9"/>
+                        <a:srgbClr val="F7F3D4"/>
                       </a:solidFill>
                       <a:prstDash val="solid"/>
                     </a:lnR>
                     <a:lnT w="9525" cap="flat" cmpd="sng" algn="ctr">
                       <a:solidFill>
-                        <a:srgbClr val="F8F2C9"/>
+                        <a:srgbClr val="F7F3D4"/>
                       </a:solidFill>
                       <a:prstDash val="solid"/>
                     </a:lnT>
                     <a:lnB w="9525" cap="flat" cmpd="sng" algn="ctr">
                       <a:solidFill>
-                        <a:srgbClr val="F8F2C9"/>
+                        <a:srgbClr val="F7F3D4"/>
                       </a:solidFill>
                       <a:prstDash val="solid"/>
                     </a:lnB>
                     <a:solidFill>
-                      <a:srgbClr val="FCFAED"/>
+                      <a:srgbClr val="FCFBF3"/>
                     </a:solidFill>
                   </a:tcPr>
                 </a:tc>
@@ -6697,7 +6697,7 @@
                       <a:r>
                         <a:rPr sz="1400" b="1">
                           <a:solidFill>
-                            <a:srgbClr val="605610"/>
+                            <a:srgbClr val="72671D"/>
                           </a:solidFill>
                         </a:rPr>
                         <a:t>암</a:t>
@@ -6707,30 +6707,30 @@
                   <a:tcPr anchor="ctr" marL="73152" marR="73152">
                     <a:lnL w="9525" cap="flat" cmpd="sng" algn="ctr">
                       <a:solidFill>
-                        <a:srgbClr val="F8F2C9"/>
+                        <a:srgbClr val="F7F3D4"/>
                       </a:solidFill>
                       <a:prstDash val="solid"/>
                     </a:lnL>
                     <a:lnR w="9525" cap="flat" cmpd="sng" algn="ctr">
                       <a:solidFill>
-                        <a:srgbClr val="F8F2C9"/>
+                        <a:srgbClr val="F7F3D4"/>
                       </a:solidFill>
                       <a:prstDash val="solid"/>
                     </a:lnR>
                     <a:lnT w="9525" cap="flat" cmpd="sng" algn="ctr">
                       <a:solidFill>
-                        <a:srgbClr val="F8F2C9"/>
+                        <a:srgbClr val="F7F3D4"/>
                       </a:solidFill>
                       <a:prstDash val="solid"/>
                     </a:lnT>
                     <a:lnB w="9525" cap="flat" cmpd="sng" algn="ctr">
                       <a:solidFill>
-                        <a:srgbClr val="F8F2C9"/>
+                        <a:srgbClr val="F7F3D4"/>
                       </a:solidFill>
                       <a:prstDash val="solid"/>
                     </a:lnB>
                     <a:solidFill>
-                      <a:srgbClr val="F8F2C9"/>
+                      <a:srgbClr val="F7F3D4"/>
                     </a:solidFill>
                   </a:tcPr>
                 </a:tc>
@@ -6753,25 +6753,25 @@
                   <a:tcPr anchor="ctr" marL="73152" marR="73152">
                     <a:lnL w="9525" cap="flat" cmpd="sng" algn="ctr">
                       <a:solidFill>
-                        <a:srgbClr val="F8F2C9"/>
+                        <a:srgbClr val="F7F3D4"/>
                       </a:solidFill>
                       <a:prstDash val="solid"/>
                     </a:lnL>
                     <a:lnR w="9525" cap="flat" cmpd="sng" algn="ctr">
                       <a:solidFill>
-                        <a:srgbClr val="F8F2C9"/>
+                        <a:srgbClr val="F7F3D4"/>
                       </a:solidFill>
                       <a:prstDash val="solid"/>
                     </a:lnR>
                     <a:lnT w="9525" cap="flat" cmpd="sng" algn="ctr">
                       <a:solidFill>
-                        <a:srgbClr val="F8F2C9"/>
+                        <a:srgbClr val="F7F3D4"/>
                       </a:solidFill>
                       <a:prstDash val="solid"/>
                     </a:lnT>
                     <a:lnB w="9525" cap="flat" cmpd="sng" algn="ctr">
                       <a:solidFill>
-                        <a:srgbClr val="F8F2C9"/>
+                        <a:srgbClr val="F7F3D4"/>
                       </a:solidFill>
                       <a:prstDash val="solid"/>
                     </a:lnB>
@@ -6799,25 +6799,25 @@
                   <a:tcPr anchor="ctr" marL="73152" marR="73152">
                     <a:lnL w="9525" cap="flat" cmpd="sng" algn="ctr">
                       <a:solidFill>
-                        <a:srgbClr val="F8F2C9"/>
+                        <a:srgbClr val="F7F3D4"/>
                       </a:solidFill>
                       <a:prstDash val="solid"/>
                     </a:lnL>
                     <a:lnR w="9525" cap="flat" cmpd="sng" algn="ctr">
                       <a:solidFill>
-                        <a:srgbClr val="F8F2C9"/>
+                        <a:srgbClr val="F7F3D4"/>
                       </a:solidFill>
                       <a:prstDash val="solid"/>
                     </a:lnR>
                     <a:lnT w="9525" cap="flat" cmpd="sng" algn="ctr">
                       <a:solidFill>
-                        <a:srgbClr val="F8F2C9"/>
+                        <a:srgbClr val="F7F3D4"/>
                       </a:solidFill>
                       <a:prstDash val="solid"/>
                     </a:lnT>
                     <a:lnB w="9525" cap="flat" cmpd="sng" algn="ctr">
                       <a:solidFill>
-                        <a:srgbClr val="F8F2C9"/>
+                        <a:srgbClr val="F7F3D4"/>
                       </a:solidFill>
                       <a:prstDash val="solid"/>
                     </a:lnB>
@@ -6845,25 +6845,25 @@
                   <a:tcPr anchor="ctr" marL="73152" marR="73152">
                     <a:lnL w="9525" cap="flat" cmpd="sng" algn="ctr">
                       <a:solidFill>
-                        <a:srgbClr val="F8F2C9"/>
+                        <a:srgbClr val="F7F3D4"/>
                       </a:solidFill>
                       <a:prstDash val="solid"/>
                     </a:lnL>
                     <a:lnR w="9525" cap="flat" cmpd="sng" algn="ctr">
                       <a:solidFill>
-                        <a:srgbClr val="F8F2C9"/>
+                        <a:srgbClr val="F7F3D4"/>
                       </a:solidFill>
                       <a:prstDash val="solid"/>
                     </a:lnR>
                     <a:lnT w="9525" cap="flat" cmpd="sng" algn="ctr">
                       <a:solidFill>
-                        <a:srgbClr val="F8F2C9"/>
+                        <a:srgbClr val="F7F3D4"/>
                       </a:solidFill>
                       <a:prstDash val="solid"/>
                     </a:lnT>
                     <a:lnB w="9525" cap="flat" cmpd="sng" algn="ctr">
                       <a:solidFill>
-                        <a:srgbClr val="F8F2C9"/>
+                        <a:srgbClr val="F7F3D4"/>
                       </a:solidFill>
                       <a:prstDash val="solid"/>
                     </a:lnB>
@@ -6883,7 +6883,7 @@
                       <a:r>
                         <a:rPr sz="1400" b="1">
                           <a:solidFill>
-                            <a:srgbClr val="605610"/>
+                            <a:srgbClr val="72671D"/>
                           </a:solidFill>
                         </a:rPr>
                         <a:t>뇌·심장</a:t>
@@ -6893,30 +6893,30 @@
                   <a:tcPr anchor="ctr" marL="73152" marR="73152">
                     <a:lnL w="9525" cap="flat" cmpd="sng" algn="ctr">
                       <a:solidFill>
-                        <a:srgbClr val="F8F2C9"/>
+                        <a:srgbClr val="F7F3D4"/>
                       </a:solidFill>
                       <a:prstDash val="solid"/>
                     </a:lnL>
                     <a:lnR w="9525" cap="flat" cmpd="sng" algn="ctr">
                       <a:solidFill>
-                        <a:srgbClr val="F8F2C9"/>
+                        <a:srgbClr val="F7F3D4"/>
                       </a:solidFill>
                       <a:prstDash val="solid"/>
                     </a:lnR>
                     <a:lnT w="9525" cap="flat" cmpd="sng" algn="ctr">
                       <a:solidFill>
-                        <a:srgbClr val="F8F2C9"/>
+                        <a:srgbClr val="F7F3D4"/>
                       </a:solidFill>
                       <a:prstDash val="solid"/>
                     </a:lnT>
                     <a:lnB w="9525" cap="flat" cmpd="sng" algn="ctr">
                       <a:solidFill>
-                        <a:srgbClr val="F8F2C9"/>
+                        <a:srgbClr val="F7F3D4"/>
                       </a:solidFill>
                       <a:prstDash val="solid"/>
                     </a:lnB>
                     <a:solidFill>
-                      <a:srgbClr val="F8F2C9"/>
+                      <a:srgbClr val="F7F3D4"/>
                     </a:solidFill>
                   </a:tcPr>
                 </a:tc>
@@ -6939,30 +6939,30 @@
                   <a:tcPr anchor="ctr" marL="73152" marR="73152">
                     <a:lnL w="9525" cap="flat" cmpd="sng" algn="ctr">
                       <a:solidFill>
-                        <a:srgbClr val="F8F2C9"/>
+                        <a:srgbClr val="F7F3D4"/>
                       </a:solidFill>
                       <a:prstDash val="solid"/>
                     </a:lnL>
                     <a:lnR w="9525" cap="flat" cmpd="sng" algn="ctr">
                       <a:solidFill>
-                        <a:srgbClr val="F8F2C9"/>
+                        <a:srgbClr val="F7F3D4"/>
                       </a:solidFill>
                       <a:prstDash val="solid"/>
                     </a:lnR>
                     <a:lnT w="9525" cap="flat" cmpd="sng" algn="ctr">
                       <a:solidFill>
-                        <a:srgbClr val="F8F2C9"/>
+                        <a:srgbClr val="F7F3D4"/>
                       </a:solidFill>
                       <a:prstDash val="solid"/>
                     </a:lnT>
                     <a:lnB w="9525" cap="flat" cmpd="sng" algn="ctr">
                       <a:solidFill>
-                        <a:srgbClr val="F8F2C9"/>
+                        <a:srgbClr val="F7F3D4"/>
                       </a:solidFill>
                       <a:prstDash val="solid"/>
                     </a:lnB>
                     <a:solidFill>
-                      <a:srgbClr val="FCFAED"/>
+                      <a:srgbClr val="FCFBF3"/>
                     </a:solidFill>
                   </a:tcPr>
                 </a:tc>
@@ -6985,30 +6985,30 @@
                   <a:tcPr anchor="ctr" marL="73152" marR="73152">
                     <a:lnL w="9525" cap="flat" cmpd="sng" algn="ctr">
                       <a:solidFill>
-                        <a:srgbClr val="F8F2C9"/>
+                        <a:srgbClr val="F7F3D4"/>
                       </a:solidFill>
                       <a:prstDash val="solid"/>
                     </a:lnL>
                     <a:lnR w="9525" cap="flat" cmpd="sng" algn="ctr">
                       <a:solidFill>
-                        <a:srgbClr val="F8F2C9"/>
+                        <a:srgbClr val="F7F3D4"/>
                       </a:solidFill>
                       <a:prstDash val="solid"/>
                     </a:lnR>
                     <a:lnT w="9525" cap="flat" cmpd="sng" algn="ctr">
                       <a:solidFill>
-                        <a:srgbClr val="F8F2C9"/>
+                        <a:srgbClr val="F7F3D4"/>
                       </a:solidFill>
                       <a:prstDash val="solid"/>
                     </a:lnT>
                     <a:lnB w="9525" cap="flat" cmpd="sng" algn="ctr">
                       <a:solidFill>
-                        <a:srgbClr val="F8F2C9"/>
+                        <a:srgbClr val="F7F3D4"/>
                       </a:solidFill>
                       <a:prstDash val="solid"/>
                     </a:lnB>
                     <a:solidFill>
-                      <a:srgbClr val="FCFAED"/>
+                      <a:srgbClr val="FCFBF3"/>
                     </a:solidFill>
                   </a:tcPr>
                 </a:tc>
@@ -7031,30 +7031,30 @@
                   <a:tcPr anchor="ctr" marL="73152" marR="73152">
                     <a:lnL w="9525" cap="flat" cmpd="sng" algn="ctr">
                       <a:solidFill>
-                        <a:srgbClr val="F8F2C9"/>
+                        <a:srgbClr val="F7F3D4"/>
                       </a:solidFill>
                       <a:prstDash val="solid"/>
                     </a:lnL>
                     <a:lnR w="9525" cap="flat" cmpd="sng" algn="ctr">
                       <a:solidFill>
-                        <a:srgbClr val="F8F2C9"/>
+                        <a:srgbClr val="F7F3D4"/>
                       </a:solidFill>
                       <a:prstDash val="solid"/>
                     </a:lnR>
                     <a:lnT w="9525" cap="flat" cmpd="sng" algn="ctr">
                       <a:solidFill>
-                        <a:srgbClr val="F8F2C9"/>
+                        <a:srgbClr val="F7F3D4"/>
                       </a:solidFill>
                       <a:prstDash val="solid"/>
                     </a:lnT>
                     <a:lnB w="9525" cap="flat" cmpd="sng" algn="ctr">
                       <a:solidFill>
-                        <a:srgbClr val="F8F2C9"/>
+                        <a:srgbClr val="F7F3D4"/>
                       </a:solidFill>
                       <a:prstDash val="solid"/>
                     </a:lnB>
                     <a:solidFill>
-                      <a:srgbClr val="FCFAED"/>
+                      <a:srgbClr val="FCFBF3"/>
                     </a:solidFill>
                   </a:tcPr>
                 </a:tc>
@@ -7069,7 +7069,7 @@
                       <a:r>
                         <a:rPr sz="1400" b="1">
                           <a:solidFill>
-                            <a:srgbClr val="605610"/>
+                            <a:srgbClr val="72671D"/>
                           </a:solidFill>
                         </a:rPr>
                         <a:t>입원·수술</a:t>
@@ -7079,30 +7079,30 @@
                   <a:tcPr anchor="ctr" marL="73152" marR="73152">
                     <a:lnL w="9525" cap="flat" cmpd="sng" algn="ctr">
                       <a:solidFill>
-                        <a:srgbClr val="F8F2C9"/>
+                        <a:srgbClr val="F7F3D4"/>
                       </a:solidFill>
                       <a:prstDash val="solid"/>
                     </a:lnL>
                     <a:lnR w="9525" cap="flat" cmpd="sng" algn="ctr">
                       <a:solidFill>
-                        <a:srgbClr val="F8F2C9"/>
+                        <a:srgbClr val="F7F3D4"/>
                       </a:solidFill>
                       <a:prstDash val="solid"/>
                     </a:lnR>
                     <a:lnT w="9525" cap="flat" cmpd="sng" algn="ctr">
                       <a:solidFill>
-                        <a:srgbClr val="F8F2C9"/>
+                        <a:srgbClr val="F7F3D4"/>
                       </a:solidFill>
                       <a:prstDash val="solid"/>
                     </a:lnT>
                     <a:lnB w="9525" cap="flat" cmpd="sng" algn="ctr">
                       <a:solidFill>
-                        <a:srgbClr val="F8F2C9"/>
+                        <a:srgbClr val="F7F3D4"/>
                       </a:solidFill>
                       <a:prstDash val="solid"/>
                     </a:lnB>
                     <a:solidFill>
-                      <a:srgbClr val="F8F2C9"/>
+                      <a:srgbClr val="F7F3D4"/>
                     </a:solidFill>
                   </a:tcPr>
                 </a:tc>
@@ -7125,25 +7125,25 @@
                   <a:tcPr anchor="ctr" marL="73152" marR="73152">
                     <a:lnL w="9525" cap="flat" cmpd="sng" algn="ctr">
                       <a:solidFill>
-                        <a:srgbClr val="F8F2C9"/>
+                        <a:srgbClr val="F7F3D4"/>
                       </a:solidFill>
                       <a:prstDash val="solid"/>
                     </a:lnL>
                     <a:lnR w="9525" cap="flat" cmpd="sng" algn="ctr">
                       <a:solidFill>
-                        <a:srgbClr val="F8F2C9"/>
+                        <a:srgbClr val="F7F3D4"/>
                       </a:solidFill>
                       <a:prstDash val="solid"/>
                     </a:lnR>
                     <a:lnT w="9525" cap="flat" cmpd="sng" algn="ctr">
                       <a:solidFill>
-                        <a:srgbClr val="F8F2C9"/>
+                        <a:srgbClr val="F7F3D4"/>
                       </a:solidFill>
                       <a:prstDash val="solid"/>
                     </a:lnT>
                     <a:lnB w="9525" cap="flat" cmpd="sng" algn="ctr">
                       <a:solidFill>
-                        <a:srgbClr val="F8F2C9"/>
+                        <a:srgbClr val="F7F3D4"/>
                       </a:solidFill>
                       <a:prstDash val="solid"/>
                     </a:lnB>
@@ -7171,25 +7171,25 @@
                   <a:tcPr anchor="ctr" marL="73152" marR="73152">
                     <a:lnL w="9525" cap="flat" cmpd="sng" algn="ctr">
                       <a:solidFill>
-                        <a:srgbClr val="F8F2C9"/>
+                        <a:srgbClr val="F7F3D4"/>
                       </a:solidFill>
                       <a:prstDash val="solid"/>
                     </a:lnL>
                     <a:lnR w="9525" cap="flat" cmpd="sng" algn="ctr">
                       <a:solidFill>
-                        <a:srgbClr val="F8F2C9"/>
+                        <a:srgbClr val="F7F3D4"/>
                       </a:solidFill>
                       <a:prstDash val="solid"/>
                     </a:lnR>
                     <a:lnT w="9525" cap="flat" cmpd="sng" algn="ctr">
                       <a:solidFill>
-                        <a:srgbClr val="F8F2C9"/>
+                        <a:srgbClr val="F7F3D4"/>
                       </a:solidFill>
                       <a:prstDash val="solid"/>
                     </a:lnT>
                     <a:lnB w="9525" cap="flat" cmpd="sng" algn="ctr">
                       <a:solidFill>
-                        <a:srgbClr val="F8F2C9"/>
+                        <a:srgbClr val="F7F3D4"/>
                       </a:solidFill>
                       <a:prstDash val="solid"/>
                     </a:lnB>
@@ -7217,25 +7217,25 @@
                   <a:tcPr anchor="ctr" marL="73152" marR="73152">
                     <a:lnL w="9525" cap="flat" cmpd="sng" algn="ctr">
                       <a:solidFill>
-                        <a:srgbClr val="F8F2C9"/>
+                        <a:srgbClr val="F7F3D4"/>
                       </a:solidFill>
                       <a:prstDash val="solid"/>
                     </a:lnL>
                     <a:lnR w="9525" cap="flat" cmpd="sng" algn="ctr">
                       <a:solidFill>
-                        <a:srgbClr val="F8F2C9"/>
+                        <a:srgbClr val="F7F3D4"/>
                       </a:solidFill>
                       <a:prstDash val="solid"/>
                     </a:lnR>
                     <a:lnT w="9525" cap="flat" cmpd="sng" algn="ctr">
                       <a:solidFill>
-                        <a:srgbClr val="F8F2C9"/>
+                        <a:srgbClr val="F7F3D4"/>
                       </a:solidFill>
                       <a:prstDash val="solid"/>
                     </a:lnT>
                     <a:lnB w="9525" cap="flat" cmpd="sng" algn="ctr">
                       <a:solidFill>
-                        <a:srgbClr val="F8F2C9"/>
+                        <a:srgbClr val="F7F3D4"/>
                       </a:solidFill>
                       <a:prstDash val="solid"/>
                     </a:lnB>
@@ -7255,7 +7255,7 @@
                       <a:r>
                         <a:rPr sz="1400" b="1">
                           <a:solidFill>
-                            <a:srgbClr val="605610"/>
+                            <a:srgbClr val="72671D"/>
                           </a:solidFill>
                         </a:rPr>
                         <a:t>상해</a:t>
@@ -7265,30 +7265,30 @@
                   <a:tcPr anchor="ctr" marL="73152" marR="73152">
                     <a:lnL w="9525" cap="flat" cmpd="sng" algn="ctr">
                       <a:solidFill>
-                        <a:srgbClr val="F8F2C9"/>
+                        <a:srgbClr val="F7F3D4"/>
                       </a:solidFill>
                       <a:prstDash val="solid"/>
                     </a:lnL>
                     <a:lnR w="9525" cap="flat" cmpd="sng" algn="ctr">
                       <a:solidFill>
-                        <a:srgbClr val="F8F2C9"/>
+                        <a:srgbClr val="F7F3D4"/>
                       </a:solidFill>
                       <a:prstDash val="solid"/>
                     </a:lnR>
                     <a:lnT w="9525" cap="flat" cmpd="sng" algn="ctr">
                       <a:solidFill>
-                        <a:srgbClr val="F8F2C9"/>
+                        <a:srgbClr val="F7F3D4"/>
                       </a:solidFill>
                       <a:prstDash val="solid"/>
                     </a:lnT>
                     <a:lnB w="9525" cap="flat" cmpd="sng" algn="ctr">
                       <a:solidFill>
-                        <a:srgbClr val="F8F2C9"/>
+                        <a:srgbClr val="F7F3D4"/>
                       </a:solidFill>
                       <a:prstDash val="solid"/>
                     </a:lnB>
                     <a:solidFill>
-                      <a:srgbClr val="F8F2C9"/>
+                      <a:srgbClr val="F7F3D4"/>
                     </a:solidFill>
                   </a:tcPr>
                 </a:tc>
@@ -7311,30 +7311,30 @@
                   <a:tcPr anchor="ctr" marL="73152" marR="73152">
                     <a:lnL w="9525" cap="flat" cmpd="sng" algn="ctr">
                       <a:solidFill>
-                        <a:srgbClr val="F8F2C9"/>
+                        <a:srgbClr val="F7F3D4"/>
                       </a:solidFill>
                       <a:prstDash val="solid"/>
                     </a:lnL>
                     <a:lnR w="9525" cap="flat" cmpd="sng" algn="ctr">
                       <a:solidFill>
-                        <a:srgbClr val="F8F2C9"/>
+                        <a:srgbClr val="F7F3D4"/>
                       </a:solidFill>
                       <a:prstDash val="solid"/>
                     </a:lnR>
                     <a:lnT w="9525" cap="flat" cmpd="sng" algn="ctr">
                       <a:solidFill>
-                        <a:srgbClr val="F8F2C9"/>
+                        <a:srgbClr val="F7F3D4"/>
                       </a:solidFill>
                       <a:prstDash val="solid"/>
                     </a:lnT>
                     <a:lnB w="9525" cap="flat" cmpd="sng" algn="ctr">
                       <a:solidFill>
-                        <a:srgbClr val="F8F2C9"/>
+                        <a:srgbClr val="F7F3D4"/>
                       </a:solidFill>
                       <a:prstDash val="solid"/>
                     </a:lnB>
                     <a:solidFill>
-                      <a:srgbClr val="FCFAED"/>
+                      <a:srgbClr val="FCFBF3"/>
                     </a:solidFill>
                   </a:tcPr>
                 </a:tc>
@@ -7357,30 +7357,30 @@
                   <a:tcPr anchor="ctr" marL="73152" marR="73152">
                     <a:lnL w="9525" cap="flat" cmpd="sng" algn="ctr">
                       <a:solidFill>
-                        <a:srgbClr val="F8F2C9"/>
+                        <a:srgbClr val="F7F3D4"/>
                       </a:solidFill>
                       <a:prstDash val="solid"/>
                     </a:lnL>
                     <a:lnR w="9525" cap="flat" cmpd="sng" algn="ctr">
                       <a:solidFill>
-                        <a:srgbClr val="F8F2C9"/>
+                        <a:srgbClr val="F7F3D4"/>
                       </a:solidFill>
                       <a:prstDash val="solid"/>
                     </a:lnR>
                     <a:lnT w="9525" cap="flat" cmpd="sng" algn="ctr">
                       <a:solidFill>
-                        <a:srgbClr val="F8F2C9"/>
+                        <a:srgbClr val="F7F3D4"/>
                       </a:solidFill>
                       <a:prstDash val="solid"/>
                     </a:lnT>
                     <a:lnB w="9525" cap="flat" cmpd="sng" algn="ctr">
                       <a:solidFill>
-                        <a:srgbClr val="F8F2C9"/>
+                        <a:srgbClr val="F7F3D4"/>
                       </a:solidFill>
                       <a:prstDash val="solid"/>
                     </a:lnB>
                     <a:solidFill>
-                      <a:srgbClr val="FCFAED"/>
+                      <a:srgbClr val="FCFBF3"/>
                     </a:solidFill>
                   </a:tcPr>
                 </a:tc>
@@ -7403,30 +7403,30 @@
                   <a:tcPr anchor="ctr" marL="73152" marR="73152">
                     <a:lnL w="9525" cap="flat" cmpd="sng" algn="ctr">
                       <a:solidFill>
-                        <a:srgbClr val="F8F2C9"/>
+                        <a:srgbClr val="F7F3D4"/>
                       </a:solidFill>
                       <a:prstDash val="solid"/>
                     </a:lnL>
                     <a:lnR w="9525" cap="flat" cmpd="sng" algn="ctr">
                       <a:solidFill>
-                        <a:srgbClr val="F8F2C9"/>
+                        <a:srgbClr val="F7F3D4"/>
                       </a:solidFill>
                       <a:prstDash val="solid"/>
                     </a:lnR>
                     <a:lnT w="9525" cap="flat" cmpd="sng" algn="ctr">
                       <a:solidFill>
-                        <a:srgbClr val="F8F2C9"/>
+                        <a:srgbClr val="F7F3D4"/>
                       </a:solidFill>
                       <a:prstDash val="solid"/>
                     </a:lnT>
                     <a:lnB w="9525" cap="flat" cmpd="sng" algn="ctr">
                       <a:solidFill>
-                        <a:srgbClr val="F8F2C9"/>
+                        <a:srgbClr val="F7F3D4"/>
                       </a:solidFill>
                       <a:prstDash val="solid"/>
                     </a:lnB>
                     <a:solidFill>
-                      <a:srgbClr val="FCFAED"/>
+                      <a:srgbClr val="FCFBF3"/>
                     </a:solidFill>
                   </a:tcPr>
                 </a:tc>
@@ -7441,7 +7441,7 @@
                       <a:r>
                         <a:rPr sz="1400" b="1">
                           <a:solidFill>
-                            <a:srgbClr val="605610"/>
+                            <a:srgbClr val="72671D"/>
                           </a:solidFill>
                         </a:rPr>
                         <a:t>실손의료</a:t>
@@ -7451,30 +7451,30 @@
                   <a:tcPr anchor="ctr" marL="73152" marR="73152">
                     <a:lnL w="9525" cap="flat" cmpd="sng" algn="ctr">
                       <a:solidFill>
-                        <a:srgbClr val="F8F2C9"/>
+                        <a:srgbClr val="F7F3D4"/>
                       </a:solidFill>
                       <a:prstDash val="solid"/>
                     </a:lnL>
                     <a:lnR w="9525" cap="flat" cmpd="sng" algn="ctr">
                       <a:solidFill>
-                        <a:srgbClr val="F8F2C9"/>
+                        <a:srgbClr val="F7F3D4"/>
                       </a:solidFill>
                       <a:prstDash val="solid"/>
                     </a:lnR>
                     <a:lnT w="9525" cap="flat" cmpd="sng" algn="ctr">
                       <a:solidFill>
-                        <a:srgbClr val="F8F2C9"/>
+                        <a:srgbClr val="F7F3D4"/>
                       </a:solidFill>
                       <a:prstDash val="solid"/>
                     </a:lnT>
                     <a:lnB w="9525" cap="flat" cmpd="sng" algn="ctr">
                       <a:solidFill>
-                        <a:srgbClr val="F8F2C9"/>
+                        <a:srgbClr val="F7F3D4"/>
                       </a:solidFill>
                       <a:prstDash val="solid"/>
                     </a:lnB>
                     <a:solidFill>
-                      <a:srgbClr val="F8F2C9"/>
+                      <a:srgbClr val="F7F3D4"/>
                     </a:solidFill>
                   </a:tcPr>
                 </a:tc>
@@ -7497,25 +7497,25 @@
                   <a:tcPr anchor="ctr" marL="73152" marR="73152">
                     <a:lnL w="9525" cap="flat" cmpd="sng" algn="ctr">
                       <a:solidFill>
-                        <a:srgbClr val="F8F2C9"/>
+                        <a:srgbClr val="F7F3D4"/>
                       </a:solidFill>
                       <a:prstDash val="solid"/>
                     </a:lnL>
                     <a:lnR w="9525" cap="flat" cmpd="sng" algn="ctr">
                       <a:solidFill>
-                        <a:srgbClr val="F8F2C9"/>
+                        <a:srgbClr val="F7F3D4"/>
                       </a:solidFill>
                       <a:prstDash val="solid"/>
                     </a:lnR>
                     <a:lnT w="9525" cap="flat" cmpd="sng" algn="ctr">
                       <a:solidFill>
-                        <a:srgbClr val="F8F2C9"/>
+                        <a:srgbClr val="F7F3D4"/>
                       </a:solidFill>
                       <a:prstDash val="solid"/>
                     </a:lnT>
                     <a:lnB w="9525" cap="flat" cmpd="sng" algn="ctr">
                       <a:solidFill>
-                        <a:srgbClr val="F8F2C9"/>
+                        <a:srgbClr val="F7F3D4"/>
                       </a:solidFill>
                       <a:prstDash val="solid"/>
                     </a:lnB>
@@ -7543,25 +7543,25 @@
                   <a:tcPr anchor="ctr" marL="73152" marR="73152">
                     <a:lnL w="9525" cap="flat" cmpd="sng" algn="ctr">
                       <a:solidFill>
-                        <a:srgbClr val="F8F2C9"/>
+                        <a:srgbClr val="F7F3D4"/>
                       </a:solidFill>
                       <a:prstDash val="solid"/>
                     </a:lnL>
                     <a:lnR w="9525" cap="flat" cmpd="sng" algn="ctr">
                       <a:solidFill>
-                        <a:srgbClr val="F8F2C9"/>
+                        <a:srgbClr val="F7F3D4"/>
                       </a:solidFill>
                       <a:prstDash val="solid"/>
                     </a:lnR>
                     <a:lnT w="9525" cap="flat" cmpd="sng" algn="ctr">
                       <a:solidFill>
-                        <a:srgbClr val="F8F2C9"/>
+                        <a:srgbClr val="F7F3D4"/>
                       </a:solidFill>
                       <a:prstDash val="solid"/>
                     </a:lnT>
                     <a:lnB w="9525" cap="flat" cmpd="sng" algn="ctr">
                       <a:solidFill>
-                        <a:srgbClr val="F8F2C9"/>
+                        <a:srgbClr val="F7F3D4"/>
                       </a:solidFill>
                       <a:prstDash val="solid"/>
                     </a:lnB>
@@ -7589,25 +7589,25 @@
                   <a:tcPr anchor="ctr" marL="73152" marR="73152">
                     <a:lnL w="9525" cap="flat" cmpd="sng" algn="ctr">
                       <a:solidFill>
-                        <a:srgbClr val="F8F2C9"/>
+                        <a:srgbClr val="F7F3D4"/>
                       </a:solidFill>
                       <a:prstDash val="solid"/>
                     </a:lnL>
                     <a:lnR w="9525" cap="flat" cmpd="sng" algn="ctr">
                       <a:solidFill>
-                        <a:srgbClr val="F8F2C9"/>
+                        <a:srgbClr val="F7F3D4"/>
                       </a:solidFill>
                       <a:prstDash val="solid"/>
                     </a:lnR>
                     <a:lnT w="9525" cap="flat" cmpd="sng" algn="ctr">
                       <a:solidFill>
-                        <a:srgbClr val="F8F2C9"/>
+                        <a:srgbClr val="F7F3D4"/>
                       </a:solidFill>
                       <a:prstDash val="solid"/>
                     </a:lnT>
                     <a:lnB w="9525" cap="flat" cmpd="sng" algn="ctr">
                       <a:solidFill>
-                        <a:srgbClr val="F8F2C9"/>
+                        <a:srgbClr val="F7F3D4"/>
                       </a:solidFill>
                       <a:prstDash val="solid"/>
                     </a:lnB>
@@ -7627,7 +7627,7 @@
                       <a:r>
                         <a:rPr sz="1400" b="1">
                           <a:solidFill>
-                            <a:srgbClr val="605610"/>
+                            <a:srgbClr val="72671D"/>
                           </a:solidFill>
                         </a:rPr>
                         <a:t>연금·노후자금</a:t>
@@ -7637,30 +7637,30 @@
                   <a:tcPr anchor="ctr" marL="73152" marR="73152">
                     <a:lnL w="9525" cap="flat" cmpd="sng" algn="ctr">
                       <a:solidFill>
-                        <a:srgbClr val="F8F2C9"/>
+                        <a:srgbClr val="F7F3D4"/>
                       </a:solidFill>
                       <a:prstDash val="solid"/>
                     </a:lnL>
                     <a:lnR w="9525" cap="flat" cmpd="sng" algn="ctr">
                       <a:solidFill>
-                        <a:srgbClr val="F8F2C9"/>
+                        <a:srgbClr val="F7F3D4"/>
                       </a:solidFill>
                       <a:prstDash val="solid"/>
                     </a:lnR>
                     <a:lnT w="9525" cap="flat" cmpd="sng" algn="ctr">
                       <a:solidFill>
-                        <a:srgbClr val="F8F2C9"/>
+                        <a:srgbClr val="F7F3D4"/>
                       </a:solidFill>
                       <a:prstDash val="solid"/>
                     </a:lnT>
                     <a:lnB w="9525" cap="flat" cmpd="sng" algn="ctr">
                       <a:solidFill>
-                        <a:srgbClr val="F8F2C9"/>
+                        <a:srgbClr val="F7F3D4"/>
                       </a:solidFill>
                       <a:prstDash val="solid"/>
                     </a:lnB>
                     <a:solidFill>
-                      <a:srgbClr val="F8F2C9"/>
+                      <a:srgbClr val="F7F3D4"/>
                     </a:solidFill>
                   </a:tcPr>
                 </a:tc>
@@ -7683,30 +7683,30 @@
                   <a:tcPr anchor="ctr" marL="73152" marR="73152">
                     <a:lnL w="9525" cap="flat" cmpd="sng" algn="ctr">
                       <a:solidFill>
-                        <a:srgbClr val="F8F2C9"/>
+                        <a:srgbClr val="F7F3D4"/>
                       </a:solidFill>
                       <a:prstDash val="solid"/>
                     </a:lnL>
                     <a:lnR w="9525" cap="flat" cmpd="sng" algn="ctr">
                       <a:solidFill>
-                        <a:srgbClr val="F8F2C9"/>
+                        <a:srgbClr val="F7F3D4"/>
                       </a:solidFill>
                       <a:prstDash val="solid"/>
                     </a:lnR>
                     <a:lnT w="9525" cap="flat" cmpd="sng" algn="ctr">
                       <a:solidFill>
-                        <a:srgbClr val="F8F2C9"/>
+                        <a:srgbClr val="F7F3D4"/>
                       </a:solidFill>
                       <a:prstDash val="solid"/>
                     </a:lnT>
                     <a:lnB w="9525" cap="flat" cmpd="sng" algn="ctr">
                       <a:solidFill>
-                        <a:srgbClr val="F8F2C9"/>
+                        <a:srgbClr val="F7F3D4"/>
                       </a:solidFill>
                       <a:prstDash val="solid"/>
                     </a:lnB>
                     <a:solidFill>
-                      <a:srgbClr val="FCFAED"/>
+                      <a:srgbClr val="FCFBF3"/>
                     </a:solidFill>
                   </a:tcPr>
                 </a:tc>
@@ -7729,30 +7729,30 @@
                   <a:tcPr anchor="ctr" marL="73152" marR="73152">
                     <a:lnL w="9525" cap="flat" cmpd="sng" algn="ctr">
                       <a:solidFill>
-                        <a:srgbClr val="F8F2C9"/>
+                        <a:srgbClr val="F7F3D4"/>
                       </a:solidFill>
                       <a:prstDash val="solid"/>
                     </a:lnL>
                     <a:lnR w="9525" cap="flat" cmpd="sng" algn="ctr">
                       <a:solidFill>
-                        <a:srgbClr val="F8F2C9"/>
+                        <a:srgbClr val="F7F3D4"/>
                       </a:solidFill>
                       <a:prstDash val="solid"/>
                     </a:lnR>
                     <a:lnT w="9525" cap="flat" cmpd="sng" algn="ctr">
                       <a:solidFill>
-                        <a:srgbClr val="F8F2C9"/>
+                        <a:srgbClr val="F7F3D4"/>
                       </a:solidFill>
                       <a:prstDash val="solid"/>
                     </a:lnT>
                     <a:lnB w="9525" cap="flat" cmpd="sng" algn="ctr">
                       <a:solidFill>
-                        <a:srgbClr val="F8F2C9"/>
+                        <a:srgbClr val="F7F3D4"/>
                       </a:solidFill>
                       <a:prstDash val="solid"/>
                     </a:lnB>
                     <a:solidFill>
-                      <a:srgbClr val="FCFAED"/>
+                      <a:srgbClr val="FCFBF3"/>
                     </a:solidFill>
                   </a:tcPr>
                 </a:tc>
@@ -7775,30 +7775,30 @@
                   <a:tcPr anchor="ctr" marL="73152" marR="73152">
                     <a:lnL w="9525" cap="flat" cmpd="sng" algn="ctr">
                       <a:solidFill>
-                        <a:srgbClr val="F8F2C9"/>
+                        <a:srgbClr val="F7F3D4"/>
                       </a:solidFill>
                       <a:prstDash val="solid"/>
                     </a:lnL>
                     <a:lnR w="9525" cap="flat" cmpd="sng" algn="ctr">
                       <a:solidFill>
-                        <a:srgbClr val="F8F2C9"/>
+                        <a:srgbClr val="F7F3D4"/>
                       </a:solidFill>
                       <a:prstDash val="solid"/>
                     </a:lnR>
                     <a:lnT w="9525" cap="flat" cmpd="sng" algn="ctr">
                       <a:solidFill>
-                        <a:srgbClr val="F8F2C9"/>
+                        <a:srgbClr val="F7F3D4"/>
                       </a:solidFill>
                       <a:prstDash val="solid"/>
                     </a:lnT>
                     <a:lnB w="9525" cap="flat" cmpd="sng" algn="ctr">
                       <a:solidFill>
-                        <a:srgbClr val="F8F2C9"/>
+                        <a:srgbClr val="F7F3D4"/>
                       </a:solidFill>
                       <a:prstDash val="solid"/>
                     </a:lnB>
                     <a:solidFill>
-                      <a:srgbClr val="FCFAED"/>
+                      <a:srgbClr val="FCFBF3"/>
                     </a:solidFill>
                   </a:tcPr>
                 </a:tc>
@@ -7848,7 +7848,7 @@
             <a:avLst/>
           </a:prstGeom>
           <a:solidFill>
-            <a:srgbClr val="B8A41E"/>
+            <a:srgbClr val="DFC93A"/>
           </a:solidFill>
           <a:ln>
             <a:noFill/>
@@ -7917,11 +7917,11 @@
             </a:avLst>
           </a:prstGeom>
           <a:solidFill>
-            <a:srgbClr val="FCFAED"/>
+            <a:srgbClr val="FCFBF3"/>
           </a:solidFill>
           <a:ln w="15875">
             <a:solidFill>
-              <a:srgbClr val="F8F2C9"/>
+              <a:srgbClr val="F7F3D4"/>
             </a:solidFill>
           </a:ln>
         </p:spPr>
@@ -7948,7 +7948,7 @@
             <a:avLst/>
           </a:prstGeom>
           <a:solidFill>
-            <a:srgbClr val="B8A41E"/>
+            <a:srgbClr val="DFC93A"/>
           </a:solidFill>
           <a:ln>
             <a:noFill/>
@@ -8006,7 +8006,7 @@
             <a:r>
               <a:rPr sz="1700" b="1" i="0">
                 <a:solidFill>
-                  <a:srgbClr val="605610"/>
+                  <a:srgbClr val="72671D"/>
                 </a:solidFill>
               </a:rPr>
               <a:t>월 보험료 합계</a:t>
@@ -8069,11 +8069,11 @@
             </a:avLst>
           </a:prstGeom>
           <a:solidFill>
-            <a:srgbClr val="FCFAED"/>
+            <a:srgbClr val="FCFBF3"/>
           </a:solidFill>
           <a:ln w="15875">
             <a:solidFill>
-              <a:srgbClr val="F8F2C9"/>
+              <a:srgbClr val="F7F3D4"/>
             </a:solidFill>
           </a:ln>
         </p:spPr>
@@ -8100,7 +8100,7 @@
             <a:avLst/>
           </a:prstGeom>
           <a:solidFill>
-            <a:srgbClr val="B8A41E"/>
+            <a:srgbClr val="DFC93A"/>
           </a:solidFill>
           <a:ln>
             <a:noFill/>
@@ -8158,7 +8158,7 @@
             <a:r>
               <a:rPr sz="1700" b="1" i="0">
                 <a:solidFill>
-                  <a:srgbClr val="605610"/>
+                  <a:srgbClr val="72671D"/>
                 </a:solidFill>
               </a:rPr>
               <a:t>연 보험료 합계</a:t>
@@ -8221,11 +8221,11 @@
             </a:avLst>
           </a:prstGeom>
           <a:solidFill>
-            <a:srgbClr val="FCFAED"/>
+            <a:srgbClr val="FCFBF3"/>
           </a:solidFill>
           <a:ln w="15875">
             <a:solidFill>
-              <a:srgbClr val="F8F2C9"/>
+              <a:srgbClr val="F7F3D4"/>
             </a:solidFill>
           </a:ln>
         </p:spPr>
@@ -8252,7 +8252,7 @@
             <a:avLst/>
           </a:prstGeom>
           <a:solidFill>
-            <a:srgbClr val="B8A41E"/>
+            <a:srgbClr val="DFC93A"/>
           </a:solidFill>
           <a:ln>
             <a:noFill/>
@@ -8310,7 +8310,7 @@
             <a:r>
               <a:rPr sz="1700" b="1" i="0">
                 <a:solidFill>
-                  <a:srgbClr val="605610"/>
+                  <a:srgbClr val="72671D"/>
                 </a:solidFill>
               </a:rPr>
               <a:t>월 소득 대비</a:t>
@@ -8435,7 +8435,7 @@
             <a:avLst/>
           </a:prstGeom>
           <a:solidFill>
-            <a:srgbClr val="B8A41E"/>
+            <a:srgbClr val="DFC93A"/>
           </a:solidFill>
           <a:ln>
             <a:noFill/>
@@ -8504,11 +8504,11 @@
             </a:avLst>
           </a:prstGeom>
           <a:solidFill>
-            <a:srgbClr val="FCFAED"/>
+            <a:srgbClr val="FCFBF3"/>
           </a:solidFill>
           <a:ln w="15875">
             <a:solidFill>
-              <a:srgbClr val="F8F2C9"/>
+              <a:srgbClr val="F7F3D4"/>
             </a:solidFill>
           </a:ln>
         </p:spPr>
@@ -8535,7 +8535,7 @@
             <a:avLst/>
           </a:prstGeom>
           <a:solidFill>
-            <a:srgbClr val="B8A41E"/>
+            <a:srgbClr val="DFC93A"/>
           </a:solidFill>
           <a:ln>
             <a:noFill/>
@@ -8593,7 +8593,7 @@
             <a:r>
               <a:rPr sz="1800" b="1" i="0">
                 <a:solidFill>
-                  <a:srgbClr val="605610"/>
+                  <a:srgbClr val="72671D"/>
                 </a:solidFill>
               </a:rPr>
               <a:t>확인할 것</a:t>
@@ -8656,11 +8656,11 @@
             </a:avLst>
           </a:prstGeom>
           <a:solidFill>
-            <a:srgbClr val="FCFAED"/>
+            <a:srgbClr val="FCFBF3"/>
           </a:solidFill>
           <a:ln w="15875">
             <a:solidFill>
-              <a:srgbClr val="F8F2C9"/>
+              <a:srgbClr val="F7F3D4"/>
             </a:solidFill>
           </a:ln>
         </p:spPr>
@@ -8687,7 +8687,7 @@
             <a:avLst/>
           </a:prstGeom>
           <a:solidFill>
-            <a:srgbClr val="B8A41E"/>
+            <a:srgbClr val="DFC93A"/>
           </a:solidFill>
           <a:ln>
             <a:noFill/>
@@ -8745,7 +8745,7 @@
             <a:r>
               <a:rPr sz="1800" b="1" i="0">
                 <a:solidFill>
-                  <a:srgbClr val="605610"/>
+                  <a:srgbClr val="72671D"/>
                 </a:solidFill>
               </a:rPr>
               <a:t>문의할 것</a:t>
@@ -8808,11 +8808,11 @@
             </a:avLst>
           </a:prstGeom>
           <a:solidFill>
-            <a:srgbClr val="FCFAED"/>
+            <a:srgbClr val="FCFBF3"/>
           </a:solidFill>
           <a:ln w="15875">
             <a:solidFill>
-              <a:srgbClr val="F8F2C9"/>
+              <a:srgbClr val="F7F3D4"/>
             </a:solidFill>
           </a:ln>
         </p:spPr>
@@ -8839,7 +8839,7 @@
             <a:avLst/>
           </a:prstGeom>
           <a:solidFill>
-            <a:srgbClr val="B8A41E"/>
+            <a:srgbClr val="DFC93A"/>
           </a:solidFill>
           <a:ln>
             <a:noFill/>
@@ -8897,7 +8897,7 @@
             <a:r>
               <a:rPr sz="1800" b="1" i="0">
                 <a:solidFill>
-                  <a:srgbClr val="605610"/>
+                  <a:srgbClr val="72671D"/>
                 </a:solidFill>
               </a:rPr>
               <a:t>정리할 날짜</a:t>
@@ -9000,34 +9000,34 @@
         <a:sysClr val="window" lastClr="FFFFFF"/>
       </a:lt1>
       <a:dk2>
-        <a:srgbClr val="605610"/>
+        <a:srgbClr val="72671D"/>
       </a:dk2>
       <a:lt2>
-        <a:srgbClr val="FCFAED"/>
+        <a:srgbClr val="FCFBF3"/>
       </a:lt2>
       <a:accent1>
-        <a:srgbClr val="B8A41E"/>
+        <a:srgbClr val="DFC93A"/>
       </a:accent1>
       <a:accent2>
-        <a:srgbClr val="3B7191"/>
+        <a:srgbClr val="339941"/>
       </a:accent2>
       <a:accent3>
-        <a:srgbClr val="605610"/>
+        <a:srgbClr val="72671D"/>
       </a:accent3>
       <a:accent4>
-        <a:srgbClr val="F8F2C9"/>
+        <a:srgbClr val="F7F3D4"/>
       </a:accent4>
       <a:accent5>
-        <a:srgbClr val="7A8A58"/>
+        <a:srgbClr val="89B13E"/>
       </a:accent5>
       <a:accent6>
-        <a:srgbClr val="A09A70"/>
+        <a:srgbClr val="AAA477"/>
       </a:accent6>
       <a:hlink>
-        <a:srgbClr val="B8A41E"/>
+        <a:srgbClr val="DFC93A"/>
       </a:hlink>
       <a:folHlink>
-        <a:srgbClr val="605610"/>
+        <a:srgbClr val="72671D"/>
       </a:folHlink>
     </a:clrScheme>
     <a:fontScheme name="Office">
